--- a/House_Price_Prediction_Presentation.pptx
+++ b/House_Price_Prediction_Presentation.pptx
@@ -18,6 +18,7 @@
     <p:sldId id="266" r:id="rId17"/>
     <p:sldId id="267" r:id="rId18"/>
     <p:sldId id="268" r:id="rId19"/>
+    <p:sldId id="269" r:id="rId20"/>
   </p:sldIdLst>
   <p:sldSz cx="12188952" cy="6858000" type="screen4x3"/>
   <p:notesSz cx="6858000" cy="9144000"/>
@@ -6789,7 +6790,7 @@
                   <a:srgbClr val="A0AEF5"/>
                 </a:solidFill>
               </a:rPr>
-              <a:t>May  6</a:t>
+              <a:t>May 10</a:t>
             </a:r>
           </a:p>
         </p:txBody>
@@ -6823,7 +6824,7 @@
                   <a:srgbClr val="FFFFFF"/>
                 </a:solidFill>
               </a:rPr>
-              <a:t>92</a:t>
+              <a:t>103</a:t>
             </a:r>
           </a:p>
         </p:txBody>
@@ -6857,7 +6858,7 @@
                   <a:srgbClr val="A0AEF5"/>
                 </a:solidFill>
               </a:rPr>
-              <a:t>Production readiness pass</a:t>
+              <a:t>PRODUCTION LOCKED ✓</a:t>
             </a:r>
           </a:p>
         </p:txBody>
@@ -7319,7 +7320,7 @@
                   <a:srgbClr val="FFFFFF"/>
                 </a:solidFill>
               </a:rPr>
-              <a:t>Key Learnings</a:t>
+              <a:t>Production Status</a:t>
             </a:r>
           </a:p>
         </p:txBody>
@@ -7353,7 +7354,7 @@
                   <a:srgbClr val="A0AEF5"/>
                 </a:solidFill>
               </a:rPr>
-              <a:t>What we would tell our past selves</a:t>
+              <a:t>System locked and ready for deployment</a:t>
             </a:r>
           </a:p>
         </p:txBody>
@@ -7367,7 +7368,7 @@
         <p:spPr>
           <a:xfrm>
             <a:off x="320040" y="1261872"/>
-            <a:ext cx="11539728" cy="969264"/>
+            <a:ext cx="5806440" cy="5358384"/>
           </a:xfrm>
           <a:prstGeom prst="rect">
             <a:avLst/>
@@ -7403,578 +7404,48 @@
       </p:sp>
       <p:sp>
         <p:nvSpPr>
-          <p:cNvPr id="8" name="Rectangle 7"/>
+          <p:cNvPr id="8" name="TextBox 7"/>
+          <p:cNvSpPr txBox="1"/>
+          <p:nvPr/>
+        </p:nvSpPr>
+        <p:spPr>
+          <a:xfrm>
+            <a:off x="502920" y="1325880"/>
+            <a:ext cx="5303520" cy="365760"/>
+          </a:xfrm>
+          <a:prstGeom prst="rect">
+            <a:avLst/>
+          </a:prstGeom>
+          <a:noFill/>
+        </p:spPr>
+        <p:txBody>
+          <a:bodyPr wrap="square">
+            <a:spAutoFit/>
+          </a:bodyPr>
+          <a:lstStyle/>
+          <a:p>
+            <a:pPr algn="l"/>
+            <a:r>
+              <a:rPr sz="1400" b="1" i="0">
+                <a:solidFill>
+                  <a:srgbClr val="1A234E"/>
+                </a:solidFill>
+              </a:rPr>
+              <a:t>Deployment Readiness</a:t>
+            </a:r>
+          </a:p>
+        </p:txBody>
+      </p:sp>
+      <p:sp>
+        <p:nvSpPr>
+          <p:cNvPr id="9" name="Rectangle 8"/>
           <p:cNvSpPr/>
           <p:nvPr/>
         </p:nvSpPr>
         <p:spPr>
           <a:xfrm>
-            <a:off x="320040" y="1261872"/>
-            <a:ext cx="493776" cy="969264"/>
-          </a:xfrm>
-          <a:prstGeom prst="rect">
-            <a:avLst/>
-          </a:prstGeom>
-          <a:solidFill>
-            <a:srgbClr val="667EEA"/>
-          </a:solidFill>
-          <a:ln>
-            <a:noFill/>
-          </a:ln>
-        </p:spPr>
-        <p:style>
-          <a:lnRef idx="1">
-            <a:schemeClr val="accent1"/>
-          </a:lnRef>
-          <a:fillRef idx="3">
-            <a:schemeClr val="accent1"/>
-          </a:fillRef>
-          <a:effectRef idx="2">
-            <a:schemeClr val="accent1"/>
-          </a:effectRef>
-          <a:fontRef idx="minor">
-            <a:schemeClr val="lt1"/>
-          </a:fontRef>
-        </p:style>
-        <p:txBody>
-          <a:bodyPr rtlCol="0" anchor="ctr"/>
-          <a:lstStyle/>
-          <a:p>
-            <a:pPr algn="ctr"/>
-          </a:p>
-        </p:txBody>
-      </p:sp>
-      <p:sp>
-        <p:nvSpPr>
-          <p:cNvPr id="9" name="TextBox 8"/>
-          <p:cNvSpPr txBox="1"/>
-          <p:nvPr/>
-        </p:nvSpPr>
-        <p:spPr>
-          <a:xfrm>
-            <a:off x="320040" y="1463039"/>
-            <a:ext cx="493776" cy="493776"/>
-          </a:xfrm>
-          <a:prstGeom prst="rect">
-            <a:avLst/>
-          </a:prstGeom>
-          <a:noFill/>
-        </p:spPr>
-        <p:txBody>
-          <a:bodyPr wrap="square">
-            <a:spAutoFit/>
-          </a:bodyPr>
-          <a:lstStyle/>
-          <a:p>
-            <a:pPr algn="ctr"/>
-            <a:r>
-              <a:rPr sz="2600" b="1" i="0">
-                <a:solidFill>
-                  <a:srgbClr val="FFFFFF"/>
-                </a:solidFill>
-              </a:rPr>
-              <a:t>1</a:t>
-            </a:r>
-          </a:p>
-        </p:txBody>
-      </p:sp>
-      <p:sp>
-        <p:nvSpPr>
-          <p:cNvPr id="10" name="TextBox 9"/>
-          <p:cNvSpPr txBox="1"/>
-          <p:nvPr/>
-        </p:nvSpPr>
-        <p:spPr>
-          <a:xfrm>
-            <a:off x="950976" y="1316736"/>
-            <a:ext cx="6949440" cy="329184"/>
-          </a:xfrm>
-          <a:prstGeom prst="rect">
-            <a:avLst/>
-          </a:prstGeom>
-          <a:noFill/>
-        </p:spPr>
-        <p:txBody>
-          <a:bodyPr wrap="square">
-            <a:spAutoFit/>
-          </a:bodyPr>
-          <a:lstStyle/>
-          <a:p>
-            <a:pPr algn="l"/>
-            <a:r>
-              <a:rPr sz="1400" b="1" i="0">
-                <a:solidFill>
-                  <a:srgbClr val="1A234E"/>
-                </a:solidFill>
-              </a:rPr>
-              <a:t>Feature Generalisation Beats Local Accuracy</a:t>
-            </a:r>
-          </a:p>
-        </p:txBody>
-      </p:sp>
-      <p:sp>
-        <p:nvSpPr>
-          <p:cNvPr id="11" name="TextBox 10"/>
-          <p:cNvSpPr txBox="1"/>
-          <p:nvPr/>
-        </p:nvSpPr>
-        <p:spPr>
-          <a:xfrm>
-            <a:off x="950976" y="1682495"/>
-            <a:ext cx="10515600" cy="493776"/>
-          </a:xfrm>
-          <a:prstGeom prst="rect">
-            <a:avLst/>
-          </a:prstGeom>
-          <a:noFill/>
-        </p:spPr>
-        <p:txBody>
-          <a:bodyPr wrap="square">
-            <a:spAutoFit/>
-          </a:bodyPr>
-          <a:lstStyle/>
-          <a:p>
-            <a:pPr algn="l"/>
-            <a:r>
-              <a:rPr sz="1100" b="0" i="0">
-                <a:solidFill>
-                  <a:srgbClr val="282838"/>
-                </a:solidFill>
-              </a:rPr>
-              <a:t>A Census ACS5-backed model generalising to all US addresses outperforms one fine-tuned for a single city. Remove local OHE columns early — they are silent zero-signal failure modes at national inference time.</a:t>
-            </a:r>
-          </a:p>
-        </p:txBody>
-      </p:sp>
-      <p:sp>
-        <p:nvSpPr>
-          <p:cNvPr id="12" name="Rectangle 11"/>
-          <p:cNvSpPr/>
-          <p:nvPr/>
-        </p:nvSpPr>
-        <p:spPr>
-          <a:xfrm>
-            <a:off x="320040" y="2331720"/>
-            <a:ext cx="11539728" cy="969264"/>
-          </a:xfrm>
-          <a:prstGeom prst="rect">
-            <a:avLst/>
-          </a:prstGeom>
-          <a:solidFill>
-            <a:srgbClr val="FFFFFF"/>
-          </a:solidFill>
-          <a:ln>
-            <a:noFill/>
-          </a:ln>
-        </p:spPr>
-        <p:style>
-          <a:lnRef idx="1">
-            <a:schemeClr val="accent1"/>
-          </a:lnRef>
-          <a:fillRef idx="3">
-            <a:schemeClr val="accent1"/>
-          </a:fillRef>
-          <a:effectRef idx="2">
-            <a:schemeClr val="accent1"/>
-          </a:effectRef>
-          <a:fontRef idx="minor">
-            <a:schemeClr val="lt1"/>
-          </a:fontRef>
-        </p:style>
-        <p:txBody>
-          <a:bodyPr rtlCol="0" anchor="ctr"/>
-          <a:lstStyle/>
-          <a:p>
-            <a:pPr algn="ctr"/>
-          </a:p>
-        </p:txBody>
-      </p:sp>
-      <p:sp>
-        <p:nvSpPr>
-          <p:cNvPr id="13" name="Rectangle 12"/>
-          <p:cNvSpPr/>
-          <p:nvPr/>
-        </p:nvSpPr>
-        <p:spPr>
-          <a:xfrm>
-            <a:off x="320040" y="2331720"/>
-            <a:ext cx="493776" cy="969264"/>
-          </a:xfrm>
-          <a:prstGeom prst="rect">
-            <a:avLst/>
-          </a:prstGeom>
-          <a:solidFill>
-            <a:srgbClr val="0E886E"/>
-          </a:solidFill>
-          <a:ln>
-            <a:noFill/>
-          </a:ln>
-        </p:spPr>
-        <p:style>
-          <a:lnRef idx="1">
-            <a:schemeClr val="accent1"/>
-          </a:lnRef>
-          <a:fillRef idx="3">
-            <a:schemeClr val="accent1"/>
-          </a:fillRef>
-          <a:effectRef idx="2">
-            <a:schemeClr val="accent1"/>
-          </a:effectRef>
-          <a:fontRef idx="minor">
-            <a:schemeClr val="lt1"/>
-          </a:fontRef>
-        </p:style>
-        <p:txBody>
-          <a:bodyPr rtlCol="0" anchor="ctr"/>
-          <a:lstStyle/>
-          <a:p>
-            <a:pPr algn="ctr"/>
-          </a:p>
-        </p:txBody>
-      </p:sp>
-      <p:sp>
-        <p:nvSpPr>
-          <p:cNvPr id="14" name="TextBox 13"/>
-          <p:cNvSpPr txBox="1"/>
-          <p:nvPr/>
-        </p:nvSpPr>
-        <p:spPr>
-          <a:xfrm>
-            <a:off x="320040" y="2532888"/>
-            <a:ext cx="493776" cy="493776"/>
-          </a:xfrm>
-          <a:prstGeom prst="rect">
-            <a:avLst/>
-          </a:prstGeom>
-          <a:noFill/>
-        </p:spPr>
-        <p:txBody>
-          <a:bodyPr wrap="square">
-            <a:spAutoFit/>
-          </a:bodyPr>
-          <a:lstStyle/>
-          <a:p>
-            <a:pPr algn="ctr"/>
-            <a:r>
-              <a:rPr sz="2600" b="1" i="0">
-                <a:solidFill>
-                  <a:srgbClr val="FFFFFF"/>
-                </a:solidFill>
-              </a:rPr>
-              <a:t>2</a:t>
-            </a:r>
-          </a:p>
-        </p:txBody>
-      </p:sp>
-      <p:sp>
-        <p:nvSpPr>
-          <p:cNvPr id="15" name="TextBox 14"/>
-          <p:cNvSpPr txBox="1"/>
-          <p:nvPr/>
-        </p:nvSpPr>
-        <p:spPr>
-          <a:xfrm>
-            <a:off x="950976" y="2386584"/>
-            <a:ext cx="6949440" cy="329184"/>
-          </a:xfrm>
-          <a:prstGeom prst="rect">
-            <a:avLst/>
-          </a:prstGeom>
-          <a:noFill/>
-        </p:spPr>
-        <p:txBody>
-          <a:bodyPr wrap="square">
-            <a:spAutoFit/>
-          </a:bodyPr>
-          <a:lstStyle/>
-          <a:p>
-            <a:pPr algn="l"/>
-            <a:r>
-              <a:rPr sz="1400" b="1" i="0">
-                <a:solidFill>
-                  <a:srgbClr val="1A234E"/>
-                </a:solidFill>
-              </a:rPr>
-              <a:t>Free Public APIs Are Production-Grade</a:t>
-            </a:r>
-          </a:p>
-        </p:txBody>
-      </p:sp>
-      <p:sp>
-        <p:nvSpPr>
-          <p:cNvPr id="16" name="TextBox 15"/>
-          <p:cNvSpPr txBox="1"/>
-          <p:nvPr/>
-        </p:nvSpPr>
-        <p:spPr>
-          <a:xfrm>
-            <a:off x="950976" y="2752344"/>
-            <a:ext cx="10515600" cy="493776"/>
-          </a:xfrm>
-          <a:prstGeom prst="rect">
-            <a:avLst/>
-          </a:prstGeom>
-          <a:noFill/>
-        </p:spPr>
-        <p:txBody>
-          <a:bodyPr wrap="square">
-            <a:spAutoFit/>
-          </a:bodyPr>
-          <a:lstStyle/>
-          <a:p>
-            <a:pPr algn="l"/>
-            <a:r>
-              <a:rPr sz="1100" b="0" i="0">
-                <a:solidFill>
-                  <a:srgbClr val="282838"/>
-                </a:solidFill>
-              </a:rPr>
-              <a:t>Nominatim, US Census ACS5, and FCC APIs are reliable, rate-limit tolerant, and sufficient for national coverage. No paid commercial geocoder was needed at our scale.</a:t>
-            </a:r>
-          </a:p>
-        </p:txBody>
-      </p:sp>
-      <p:sp>
-        <p:nvSpPr>
-          <p:cNvPr id="17" name="Rectangle 16"/>
-          <p:cNvSpPr/>
-          <p:nvPr/>
-        </p:nvSpPr>
-        <p:spPr>
-          <a:xfrm>
-            <a:off x="320040" y="3401568"/>
-            <a:ext cx="11539728" cy="969264"/>
-          </a:xfrm>
-          <a:prstGeom prst="rect">
-            <a:avLst/>
-          </a:prstGeom>
-          <a:solidFill>
-            <a:srgbClr val="FFFFFF"/>
-          </a:solidFill>
-          <a:ln>
-            <a:noFill/>
-          </a:ln>
-        </p:spPr>
-        <p:style>
-          <a:lnRef idx="1">
-            <a:schemeClr val="accent1"/>
-          </a:lnRef>
-          <a:fillRef idx="3">
-            <a:schemeClr val="accent1"/>
-          </a:fillRef>
-          <a:effectRef idx="2">
-            <a:schemeClr val="accent1"/>
-          </a:effectRef>
-          <a:fontRef idx="minor">
-            <a:schemeClr val="lt1"/>
-          </a:fontRef>
-        </p:style>
-        <p:txBody>
-          <a:bodyPr rtlCol="0" anchor="ctr"/>
-          <a:lstStyle/>
-          <a:p>
-            <a:pPr algn="ctr"/>
-          </a:p>
-        </p:txBody>
-      </p:sp>
-      <p:sp>
-        <p:nvSpPr>
-          <p:cNvPr id="18" name="Rectangle 17"/>
-          <p:cNvSpPr/>
-          <p:nvPr/>
-        </p:nvSpPr>
-        <p:spPr>
-          <a:xfrm>
-            <a:off x="320040" y="3401568"/>
-            <a:ext cx="493776" cy="969264"/>
-          </a:xfrm>
-          <a:prstGeom prst="rect">
-            <a:avLst/>
-          </a:prstGeom>
-          <a:solidFill>
-            <a:srgbClr val="D4741A"/>
-          </a:solidFill>
-          <a:ln>
-            <a:noFill/>
-          </a:ln>
-        </p:spPr>
-        <p:style>
-          <a:lnRef idx="1">
-            <a:schemeClr val="accent1"/>
-          </a:lnRef>
-          <a:fillRef idx="3">
-            <a:schemeClr val="accent1"/>
-          </a:fillRef>
-          <a:effectRef idx="2">
-            <a:schemeClr val="accent1"/>
-          </a:effectRef>
-          <a:fontRef idx="minor">
-            <a:schemeClr val="lt1"/>
-          </a:fontRef>
-        </p:style>
-        <p:txBody>
-          <a:bodyPr rtlCol="0" anchor="ctr"/>
-          <a:lstStyle/>
-          <a:p>
-            <a:pPr algn="ctr"/>
-          </a:p>
-        </p:txBody>
-      </p:sp>
-      <p:sp>
-        <p:nvSpPr>
-          <p:cNvPr id="19" name="TextBox 18"/>
-          <p:cNvSpPr txBox="1"/>
-          <p:nvPr/>
-        </p:nvSpPr>
-        <p:spPr>
-          <a:xfrm>
-            <a:off x="320040" y="3602736"/>
-            <a:ext cx="493776" cy="493776"/>
-          </a:xfrm>
-          <a:prstGeom prst="rect">
-            <a:avLst/>
-          </a:prstGeom>
-          <a:noFill/>
-        </p:spPr>
-        <p:txBody>
-          <a:bodyPr wrap="square">
-            <a:spAutoFit/>
-          </a:bodyPr>
-          <a:lstStyle/>
-          <a:p>
-            <a:pPr algn="ctr"/>
-            <a:r>
-              <a:rPr sz="2600" b="1" i="0">
-                <a:solidFill>
-                  <a:srgbClr val="FFFFFF"/>
-                </a:solidFill>
-              </a:rPr>
-              <a:t>3</a:t>
-            </a:r>
-          </a:p>
-        </p:txBody>
-      </p:sp>
-      <p:sp>
-        <p:nvSpPr>
-          <p:cNvPr id="20" name="TextBox 19"/>
-          <p:cNvSpPr txBox="1"/>
-          <p:nvPr/>
-        </p:nvSpPr>
-        <p:spPr>
-          <a:xfrm>
-            <a:off x="950976" y="3456432"/>
-            <a:ext cx="6949440" cy="329184"/>
-          </a:xfrm>
-          <a:prstGeom prst="rect">
-            <a:avLst/>
-          </a:prstGeom>
-          <a:noFill/>
-        </p:spPr>
-        <p:txBody>
-          <a:bodyPr wrap="square">
-            <a:spAutoFit/>
-          </a:bodyPr>
-          <a:lstStyle/>
-          <a:p>
-            <a:pPr algn="l"/>
-            <a:r>
-              <a:rPr sz="1400" b="1" i="0">
-                <a:solidFill>
-                  <a:srgbClr val="1A234E"/>
-                </a:solidFill>
-              </a:rPr>
-              <a:t>Schema Discipline Saves Hours of Debugging</a:t>
-            </a:r>
-          </a:p>
-        </p:txBody>
-      </p:sp>
-      <p:sp>
-        <p:nvSpPr>
-          <p:cNvPr id="21" name="TextBox 20"/>
-          <p:cNvSpPr txBox="1"/>
-          <p:nvPr/>
-        </p:nvSpPr>
-        <p:spPr>
-          <a:xfrm>
-            <a:off x="950976" y="3822191"/>
-            <a:ext cx="10515600" cy="493776"/>
-          </a:xfrm>
-          <a:prstGeom prst="rect">
-            <a:avLst/>
-          </a:prstGeom>
-          <a:noFill/>
-        </p:spPr>
-        <p:txBody>
-          <a:bodyPr wrap="square">
-            <a:spAutoFit/>
-          </a:bodyPr>
-          <a:lstStyle/>
-          <a:p>
-            <a:pPr algn="l"/>
-            <a:r>
-              <a:rPr sz="1100" b="0" i="0">
-                <a:solidFill>
-                  <a:srgbClr val="282838"/>
-                </a:solidFill>
-              </a:rPr>
-              <a:t>Running Alembic migration-first from day one would have prevented the production 500-error incident. Always treat DB schema as code — never a runtime convenience.</a:t>
-            </a:r>
-          </a:p>
-        </p:txBody>
-      </p:sp>
-      <p:sp>
-        <p:nvSpPr>
-          <p:cNvPr id="22" name="Rectangle 21"/>
-          <p:cNvSpPr/>
-          <p:nvPr/>
-        </p:nvSpPr>
-        <p:spPr>
-          <a:xfrm>
-            <a:off x="320040" y="4471416"/>
-            <a:ext cx="11539728" cy="969264"/>
-          </a:xfrm>
-          <a:prstGeom prst="rect">
-            <a:avLst/>
-          </a:prstGeom>
-          <a:solidFill>
-            <a:srgbClr val="FFFFFF"/>
-          </a:solidFill>
-          <a:ln>
-            <a:noFill/>
-          </a:ln>
-        </p:spPr>
-        <p:style>
-          <a:lnRef idx="1">
-            <a:schemeClr val="accent1"/>
-          </a:lnRef>
-          <a:fillRef idx="3">
-            <a:schemeClr val="accent1"/>
-          </a:fillRef>
-          <a:effectRef idx="2">
-            <a:schemeClr val="accent1"/>
-          </a:effectRef>
-          <a:fontRef idx="minor">
-            <a:schemeClr val="lt1"/>
-          </a:fontRef>
-        </p:style>
-        <p:txBody>
-          <a:bodyPr rtlCol="0" anchor="ctr"/>
-          <a:lstStyle/>
-          <a:p>
-            <a:pPr algn="ctr"/>
-          </a:p>
-        </p:txBody>
-      </p:sp>
-      <p:sp>
-        <p:nvSpPr>
-          <p:cNvPr id="23" name="Rectangle 22"/>
-          <p:cNvSpPr/>
-          <p:nvPr/>
-        </p:nvSpPr>
-        <p:spPr>
-          <a:xfrm>
-            <a:off x="320040" y="4471416"/>
-            <a:ext cx="493776" cy="969264"/>
+            <a:off x="420624" y="1856231"/>
+            <a:ext cx="219456" cy="219456"/>
           </a:xfrm>
           <a:prstGeom prst="rect">
             <a:avLst/>
@@ -8010,122 +7481,122 @@
       </p:sp>
       <p:sp>
         <p:nvSpPr>
-          <p:cNvPr id="24" name="TextBox 23"/>
-          <p:cNvSpPr txBox="1"/>
-          <p:nvPr/>
-        </p:nvSpPr>
-        <p:spPr>
-          <a:xfrm>
-            <a:off x="320040" y="4672583"/>
-            <a:ext cx="493776" cy="493776"/>
-          </a:xfrm>
-          <a:prstGeom prst="rect">
-            <a:avLst/>
-          </a:prstGeom>
-          <a:noFill/>
-        </p:spPr>
-        <p:txBody>
-          <a:bodyPr wrap="square">
-            <a:spAutoFit/>
-          </a:bodyPr>
-          <a:lstStyle/>
-          <a:p>
-            <a:pPr algn="ctr"/>
-            <a:r>
-              <a:rPr sz="2600" b="1" i="0">
+          <p:cNvPr id="10" name="TextBox 9"/>
+          <p:cNvSpPr txBox="1"/>
+          <p:nvPr/>
+        </p:nvSpPr>
+        <p:spPr>
+          <a:xfrm>
+            <a:off x="457200" y="1828800"/>
+            <a:ext cx="146304" cy="274320"/>
+          </a:xfrm>
+          <a:prstGeom prst="rect">
+            <a:avLst/>
+          </a:prstGeom>
+          <a:noFill/>
+        </p:spPr>
+        <p:txBody>
+          <a:bodyPr wrap="square">
+            <a:spAutoFit/>
+          </a:bodyPr>
+          <a:lstStyle/>
+          <a:p>
+            <a:pPr algn="ctr"/>
+            <a:r>
+              <a:rPr sz="1400" b="1" i="0">
                 <a:solidFill>
                   <a:srgbClr val="FFFFFF"/>
                 </a:solidFill>
               </a:rPr>
-              <a:t>4</a:t>
-            </a:r>
-          </a:p>
-        </p:txBody>
-      </p:sp>
-      <p:sp>
-        <p:nvSpPr>
-          <p:cNvPr id="25" name="TextBox 24"/>
-          <p:cNvSpPr txBox="1"/>
-          <p:nvPr/>
-        </p:nvSpPr>
-        <p:spPr>
-          <a:xfrm>
-            <a:off x="950976" y="4526279"/>
-            <a:ext cx="6949440" cy="329184"/>
-          </a:xfrm>
-          <a:prstGeom prst="rect">
-            <a:avLst/>
-          </a:prstGeom>
-          <a:noFill/>
-        </p:spPr>
-        <p:txBody>
-          <a:bodyPr wrap="square">
-            <a:spAutoFit/>
-          </a:bodyPr>
-          <a:lstStyle/>
-          <a:p>
-            <a:pPr algn="l"/>
-            <a:r>
-              <a:rPr sz="1400" b="1" i="0">
-                <a:solidFill>
-                  <a:srgbClr val="1A234E"/>
-                </a:solidFill>
-              </a:rPr>
-              <a:t>Interaction Features &amp; Outlier Capping Are High-ROI</a:t>
-            </a:r>
-          </a:p>
-        </p:txBody>
-      </p:sp>
-      <p:sp>
-        <p:nvSpPr>
-          <p:cNvPr id="26" name="TextBox 25"/>
-          <p:cNvSpPr txBox="1"/>
-          <p:nvPr/>
-        </p:nvSpPr>
-        <p:spPr>
-          <a:xfrm>
-            <a:off x="950976" y="4892040"/>
-            <a:ext cx="10515600" cy="493776"/>
-          </a:xfrm>
-          <a:prstGeom prst="rect">
-            <a:avLst/>
-          </a:prstGeom>
-          <a:noFill/>
-        </p:spPr>
-        <p:txBody>
-          <a:bodyPr wrap="square">
-            <a:spAutoFit/>
-          </a:bodyPr>
-          <a:lstStyle/>
-          <a:p>
-            <a:pPr algn="l"/>
-            <a:r>
-              <a:rPr sz="1100" b="0" i="0">
+              <a:t>✓</a:t>
+            </a:r>
+          </a:p>
+        </p:txBody>
+      </p:sp>
+      <p:sp>
+        <p:nvSpPr>
+          <p:cNvPr id="11" name="TextBox 10"/>
+          <p:cNvSpPr txBox="1"/>
+          <p:nvPr/>
+        </p:nvSpPr>
+        <p:spPr>
+          <a:xfrm>
+            <a:off x="713232" y="1810512"/>
+            <a:ext cx="2377440" cy="274320"/>
+          </a:xfrm>
+          <a:prstGeom prst="rect">
+            <a:avLst/>
+          </a:prstGeom>
+          <a:noFill/>
+        </p:spPr>
+        <p:txBody>
+          <a:bodyPr wrap="square">
+            <a:spAutoFit/>
+          </a:bodyPr>
+          <a:lstStyle/>
+          <a:p>
+            <a:pPr algn="l"/>
+            <a:r>
+              <a:rPr sz="1200" b="1" i="0">
                 <a:solidFill>
                   <a:srgbClr val="282838"/>
                 </a:solidFill>
               </a:rPr>
-              <a:t>QualArea (OverallQual × GrLivArea) + p99 price capping dropped RMSE by 26% in one pass — larger gain than adding an entire new data source.</a:t>
-            </a:r>
-          </a:p>
-        </p:txBody>
-      </p:sp>
-      <p:sp>
-        <p:nvSpPr>
-          <p:cNvPr id="27" name="Rectangle 26"/>
+              <a:t>Code Quality</a:t>
+            </a:r>
+          </a:p>
+        </p:txBody>
+      </p:sp>
+      <p:sp>
+        <p:nvSpPr>
+          <p:cNvPr id="12" name="TextBox 11"/>
+          <p:cNvSpPr txBox="1"/>
+          <p:nvPr/>
+        </p:nvSpPr>
+        <p:spPr>
+          <a:xfrm>
+            <a:off x="713232" y="2084831"/>
+            <a:ext cx="5120640" cy="310896"/>
+          </a:xfrm>
+          <a:prstGeom prst="rect">
+            <a:avLst/>
+          </a:prstGeom>
+          <a:noFill/>
+        </p:spPr>
+        <p:txBody>
+          <a:bodyPr wrap="square">
+            <a:spAutoFit/>
+          </a:bodyPr>
+          <a:lstStyle/>
+          <a:p>
+            <a:pPr algn="l"/>
+            <a:r>
+              <a:rPr sz="1000" b="0" i="1">
+                <a:solidFill>
+                  <a:srgbClr val="666677"/>
+                </a:solidFill>
+              </a:rPr>
+              <a:t>No syntax/lint errors — all critical files verified</a:t>
+            </a:r>
+          </a:p>
+        </p:txBody>
+      </p:sp>
+      <p:sp>
+        <p:nvSpPr>
+          <p:cNvPr id="13" name="Rectangle 12"/>
           <p:cNvSpPr/>
           <p:nvPr/>
         </p:nvSpPr>
         <p:spPr>
           <a:xfrm>
-            <a:off x="320040" y="5541264"/>
-            <a:ext cx="11539728" cy="969264"/>
+            <a:off x="420624" y="2578608"/>
+            <a:ext cx="219456" cy="219456"/>
           </a:xfrm>
           <a:prstGeom prst="rect">
             <a:avLst/>
           </a:prstGeom>
           <a:solidFill>
-            <a:srgbClr val="FFFFFF"/>
+            <a:srgbClr val="27AE60"/>
           </a:solidFill>
           <a:ln>
             <a:noFill/>
@@ -8155,14 +7626,696 @@
       </p:sp>
       <p:sp>
         <p:nvSpPr>
-          <p:cNvPr id="28" name="Rectangle 27"/>
+          <p:cNvPr id="14" name="TextBox 13"/>
+          <p:cNvSpPr txBox="1"/>
+          <p:nvPr/>
+        </p:nvSpPr>
+        <p:spPr>
+          <a:xfrm>
+            <a:off x="457200" y="2551176"/>
+            <a:ext cx="146304" cy="274320"/>
+          </a:xfrm>
+          <a:prstGeom prst="rect">
+            <a:avLst/>
+          </a:prstGeom>
+          <a:noFill/>
+        </p:spPr>
+        <p:txBody>
+          <a:bodyPr wrap="square">
+            <a:spAutoFit/>
+          </a:bodyPr>
+          <a:lstStyle/>
+          <a:p>
+            <a:pPr algn="ctr"/>
+            <a:r>
+              <a:rPr sz="1400" b="1" i="0">
+                <a:solidFill>
+                  <a:srgbClr val="FFFFFF"/>
+                </a:solidFill>
+              </a:rPr>
+              <a:t>✓</a:t>
+            </a:r>
+          </a:p>
+        </p:txBody>
+      </p:sp>
+      <p:sp>
+        <p:nvSpPr>
+          <p:cNvPr id="15" name="TextBox 14"/>
+          <p:cNvSpPr txBox="1"/>
+          <p:nvPr/>
+        </p:nvSpPr>
+        <p:spPr>
+          <a:xfrm>
+            <a:off x="713232" y="2532888"/>
+            <a:ext cx="2377440" cy="274320"/>
+          </a:xfrm>
+          <a:prstGeom prst="rect">
+            <a:avLst/>
+          </a:prstGeom>
+          <a:noFill/>
+        </p:spPr>
+        <p:txBody>
+          <a:bodyPr wrap="square">
+            <a:spAutoFit/>
+          </a:bodyPr>
+          <a:lstStyle/>
+          <a:p>
+            <a:pPr algn="l"/>
+            <a:r>
+              <a:rPr sz="1200" b="1" i="0">
+                <a:solidFill>
+                  <a:srgbClr val="282838"/>
+                </a:solidFill>
+              </a:rPr>
+              <a:t>Test Suite</a:t>
+            </a:r>
+          </a:p>
+        </p:txBody>
+      </p:sp>
+      <p:sp>
+        <p:nvSpPr>
+          <p:cNvPr id="16" name="TextBox 15"/>
+          <p:cNvSpPr txBox="1"/>
+          <p:nvPr/>
+        </p:nvSpPr>
+        <p:spPr>
+          <a:xfrm>
+            <a:off x="713232" y="2807208"/>
+            <a:ext cx="5120640" cy="310896"/>
+          </a:xfrm>
+          <a:prstGeom prst="rect">
+            <a:avLst/>
+          </a:prstGeom>
+          <a:noFill/>
+        </p:spPr>
+        <p:txBody>
+          <a:bodyPr wrap="square">
+            <a:spAutoFit/>
+          </a:bodyPr>
+          <a:lstStyle/>
+          <a:p>
+            <a:pPr algn="l"/>
+            <a:r>
+              <a:rPr sz="1000" b="0" i="1">
+                <a:solidFill>
+                  <a:srgbClr val="666677"/>
+                </a:solidFill>
+              </a:rPr>
+              <a:t>103/103 tests passing (100% success rate)</a:t>
+            </a:r>
+          </a:p>
+        </p:txBody>
+      </p:sp>
+      <p:sp>
+        <p:nvSpPr>
+          <p:cNvPr id="17" name="Rectangle 16"/>
           <p:cNvSpPr/>
           <p:nvPr/>
         </p:nvSpPr>
         <p:spPr>
           <a:xfrm>
-            <a:off x="320040" y="5541264"/>
-            <a:ext cx="493776" cy="969264"/>
+            <a:off x="420624" y="3300984"/>
+            <a:ext cx="219456" cy="219456"/>
+          </a:xfrm>
+          <a:prstGeom prst="rect">
+            <a:avLst/>
+          </a:prstGeom>
+          <a:solidFill>
+            <a:srgbClr val="27AE60"/>
+          </a:solidFill>
+          <a:ln>
+            <a:noFill/>
+          </a:ln>
+        </p:spPr>
+        <p:style>
+          <a:lnRef idx="1">
+            <a:schemeClr val="accent1"/>
+          </a:lnRef>
+          <a:fillRef idx="3">
+            <a:schemeClr val="accent1"/>
+          </a:fillRef>
+          <a:effectRef idx="2">
+            <a:schemeClr val="accent1"/>
+          </a:effectRef>
+          <a:fontRef idx="minor">
+            <a:schemeClr val="lt1"/>
+          </a:fontRef>
+        </p:style>
+        <p:txBody>
+          <a:bodyPr rtlCol="0" anchor="ctr"/>
+          <a:lstStyle/>
+          <a:p>
+            <a:pPr algn="ctr"/>
+          </a:p>
+        </p:txBody>
+      </p:sp>
+      <p:sp>
+        <p:nvSpPr>
+          <p:cNvPr id="18" name="TextBox 17"/>
+          <p:cNvSpPr txBox="1"/>
+          <p:nvPr/>
+        </p:nvSpPr>
+        <p:spPr>
+          <a:xfrm>
+            <a:off x="457200" y="3273552"/>
+            <a:ext cx="146304" cy="274320"/>
+          </a:xfrm>
+          <a:prstGeom prst="rect">
+            <a:avLst/>
+          </a:prstGeom>
+          <a:noFill/>
+        </p:spPr>
+        <p:txBody>
+          <a:bodyPr wrap="square">
+            <a:spAutoFit/>
+          </a:bodyPr>
+          <a:lstStyle/>
+          <a:p>
+            <a:pPr algn="ctr"/>
+            <a:r>
+              <a:rPr sz="1400" b="1" i="0">
+                <a:solidFill>
+                  <a:srgbClr val="FFFFFF"/>
+                </a:solidFill>
+              </a:rPr>
+              <a:t>✓</a:t>
+            </a:r>
+          </a:p>
+        </p:txBody>
+      </p:sp>
+      <p:sp>
+        <p:nvSpPr>
+          <p:cNvPr id="19" name="TextBox 18"/>
+          <p:cNvSpPr txBox="1"/>
+          <p:nvPr/>
+        </p:nvSpPr>
+        <p:spPr>
+          <a:xfrm>
+            <a:off x="713232" y="3255264"/>
+            <a:ext cx="2377440" cy="274320"/>
+          </a:xfrm>
+          <a:prstGeom prst="rect">
+            <a:avLst/>
+          </a:prstGeom>
+          <a:noFill/>
+        </p:spPr>
+        <p:txBody>
+          <a:bodyPr wrap="square">
+            <a:spAutoFit/>
+          </a:bodyPr>
+          <a:lstStyle/>
+          <a:p>
+            <a:pPr algn="l"/>
+            <a:r>
+              <a:rPr sz="1200" b="1" i="0">
+                <a:solidFill>
+                  <a:srgbClr val="282838"/>
+                </a:solidFill>
+              </a:rPr>
+              <a:t>Database Schema</a:t>
+            </a:r>
+          </a:p>
+        </p:txBody>
+      </p:sp>
+      <p:sp>
+        <p:nvSpPr>
+          <p:cNvPr id="20" name="TextBox 19"/>
+          <p:cNvSpPr txBox="1"/>
+          <p:nvPr/>
+        </p:nvSpPr>
+        <p:spPr>
+          <a:xfrm>
+            <a:off x="713232" y="3529584"/>
+            <a:ext cx="5120640" cy="310896"/>
+          </a:xfrm>
+          <a:prstGeom prst="rect">
+            <a:avLst/>
+          </a:prstGeom>
+          <a:noFill/>
+        </p:spPr>
+        <p:txBody>
+          <a:bodyPr wrap="square">
+            <a:spAutoFit/>
+          </a:bodyPr>
+          <a:lstStyle/>
+          <a:p>
+            <a:pPr algn="l"/>
+            <a:r>
+              <a:rPr sz="1000" b="0" i="1">
+                <a:solidFill>
+                  <a:srgbClr val="666677"/>
+                </a:solidFill>
+              </a:rPr>
+              <a:t>All 8 migrations applied (v20260417_000008)</a:t>
+            </a:r>
+          </a:p>
+        </p:txBody>
+      </p:sp>
+      <p:sp>
+        <p:nvSpPr>
+          <p:cNvPr id="21" name="Rectangle 20"/>
+          <p:cNvSpPr/>
+          <p:nvPr/>
+        </p:nvSpPr>
+        <p:spPr>
+          <a:xfrm>
+            <a:off x="420624" y="4023360"/>
+            <a:ext cx="219456" cy="219456"/>
+          </a:xfrm>
+          <a:prstGeom prst="rect">
+            <a:avLst/>
+          </a:prstGeom>
+          <a:solidFill>
+            <a:srgbClr val="27AE60"/>
+          </a:solidFill>
+          <a:ln>
+            <a:noFill/>
+          </a:ln>
+        </p:spPr>
+        <p:style>
+          <a:lnRef idx="1">
+            <a:schemeClr val="accent1"/>
+          </a:lnRef>
+          <a:fillRef idx="3">
+            <a:schemeClr val="accent1"/>
+          </a:fillRef>
+          <a:effectRef idx="2">
+            <a:schemeClr val="accent1"/>
+          </a:effectRef>
+          <a:fontRef idx="minor">
+            <a:schemeClr val="lt1"/>
+          </a:fontRef>
+        </p:style>
+        <p:txBody>
+          <a:bodyPr rtlCol="0" anchor="ctr"/>
+          <a:lstStyle/>
+          <a:p>
+            <a:pPr algn="ctr"/>
+          </a:p>
+        </p:txBody>
+      </p:sp>
+      <p:sp>
+        <p:nvSpPr>
+          <p:cNvPr id="22" name="TextBox 21"/>
+          <p:cNvSpPr txBox="1"/>
+          <p:nvPr/>
+        </p:nvSpPr>
+        <p:spPr>
+          <a:xfrm>
+            <a:off x="457200" y="3995928"/>
+            <a:ext cx="146304" cy="274320"/>
+          </a:xfrm>
+          <a:prstGeom prst="rect">
+            <a:avLst/>
+          </a:prstGeom>
+          <a:noFill/>
+        </p:spPr>
+        <p:txBody>
+          <a:bodyPr wrap="square">
+            <a:spAutoFit/>
+          </a:bodyPr>
+          <a:lstStyle/>
+          <a:p>
+            <a:pPr algn="ctr"/>
+            <a:r>
+              <a:rPr sz="1400" b="1" i="0">
+                <a:solidFill>
+                  <a:srgbClr val="FFFFFF"/>
+                </a:solidFill>
+              </a:rPr>
+              <a:t>✓</a:t>
+            </a:r>
+          </a:p>
+        </p:txBody>
+      </p:sp>
+      <p:sp>
+        <p:nvSpPr>
+          <p:cNvPr id="23" name="TextBox 22"/>
+          <p:cNvSpPr txBox="1"/>
+          <p:nvPr/>
+        </p:nvSpPr>
+        <p:spPr>
+          <a:xfrm>
+            <a:off x="713232" y="3977639"/>
+            <a:ext cx="2377440" cy="274320"/>
+          </a:xfrm>
+          <a:prstGeom prst="rect">
+            <a:avLst/>
+          </a:prstGeom>
+          <a:noFill/>
+        </p:spPr>
+        <p:txBody>
+          <a:bodyPr wrap="square">
+            <a:spAutoFit/>
+          </a:bodyPr>
+          <a:lstStyle/>
+          <a:p>
+            <a:pPr algn="l"/>
+            <a:r>
+              <a:rPr sz="1200" b="1" i="0">
+                <a:solidFill>
+                  <a:srgbClr val="282838"/>
+                </a:solidFill>
+              </a:rPr>
+              <a:t>API Contract</a:t>
+            </a:r>
+          </a:p>
+        </p:txBody>
+      </p:sp>
+      <p:sp>
+        <p:nvSpPr>
+          <p:cNvPr id="24" name="TextBox 23"/>
+          <p:cNvSpPr txBox="1"/>
+          <p:nvPr/>
+        </p:nvSpPr>
+        <p:spPr>
+          <a:xfrm>
+            <a:off x="713232" y="4251960"/>
+            <a:ext cx="5120640" cy="310896"/>
+          </a:xfrm>
+          <a:prstGeom prst="rect">
+            <a:avLst/>
+          </a:prstGeom>
+          <a:noFill/>
+        </p:spPr>
+        <p:txBody>
+          <a:bodyPr wrap="square">
+            <a:spAutoFit/>
+          </a:bodyPr>
+          <a:lstStyle/>
+          <a:p>
+            <a:pPr algn="l"/>
+            <a:r>
+              <a:rPr sz="1000" b="0" i="1">
+                <a:solidFill>
+                  <a:srgbClr val="666677"/>
+                </a:solidFill>
+              </a:rPr>
+              <a:t>Modern `/v1/*` endpoints fully validated</a:t>
+            </a:r>
+          </a:p>
+        </p:txBody>
+      </p:sp>
+      <p:sp>
+        <p:nvSpPr>
+          <p:cNvPr id="25" name="Rectangle 24"/>
+          <p:cNvSpPr/>
+          <p:nvPr/>
+        </p:nvSpPr>
+        <p:spPr>
+          <a:xfrm>
+            <a:off x="420624" y="4745736"/>
+            <a:ext cx="219456" cy="219456"/>
+          </a:xfrm>
+          <a:prstGeom prst="rect">
+            <a:avLst/>
+          </a:prstGeom>
+          <a:solidFill>
+            <a:srgbClr val="27AE60"/>
+          </a:solidFill>
+          <a:ln>
+            <a:noFill/>
+          </a:ln>
+        </p:spPr>
+        <p:style>
+          <a:lnRef idx="1">
+            <a:schemeClr val="accent1"/>
+          </a:lnRef>
+          <a:fillRef idx="3">
+            <a:schemeClr val="accent1"/>
+          </a:fillRef>
+          <a:effectRef idx="2">
+            <a:schemeClr val="accent1"/>
+          </a:effectRef>
+          <a:fontRef idx="minor">
+            <a:schemeClr val="lt1"/>
+          </a:fontRef>
+        </p:style>
+        <p:txBody>
+          <a:bodyPr rtlCol="0" anchor="ctr"/>
+          <a:lstStyle/>
+          <a:p>
+            <a:pPr algn="ctr"/>
+          </a:p>
+        </p:txBody>
+      </p:sp>
+      <p:sp>
+        <p:nvSpPr>
+          <p:cNvPr id="26" name="TextBox 25"/>
+          <p:cNvSpPr txBox="1"/>
+          <p:nvPr/>
+        </p:nvSpPr>
+        <p:spPr>
+          <a:xfrm>
+            <a:off x="457200" y="4718304"/>
+            <a:ext cx="146304" cy="274320"/>
+          </a:xfrm>
+          <a:prstGeom prst="rect">
+            <a:avLst/>
+          </a:prstGeom>
+          <a:noFill/>
+        </p:spPr>
+        <p:txBody>
+          <a:bodyPr wrap="square">
+            <a:spAutoFit/>
+          </a:bodyPr>
+          <a:lstStyle/>
+          <a:p>
+            <a:pPr algn="ctr"/>
+            <a:r>
+              <a:rPr sz="1400" b="1" i="0">
+                <a:solidFill>
+                  <a:srgbClr val="FFFFFF"/>
+                </a:solidFill>
+              </a:rPr>
+              <a:t>✓</a:t>
+            </a:r>
+          </a:p>
+        </p:txBody>
+      </p:sp>
+      <p:sp>
+        <p:nvSpPr>
+          <p:cNvPr id="27" name="TextBox 26"/>
+          <p:cNvSpPr txBox="1"/>
+          <p:nvPr/>
+        </p:nvSpPr>
+        <p:spPr>
+          <a:xfrm>
+            <a:off x="713232" y="4700016"/>
+            <a:ext cx="2377440" cy="274320"/>
+          </a:xfrm>
+          <a:prstGeom prst="rect">
+            <a:avLst/>
+          </a:prstGeom>
+          <a:noFill/>
+        </p:spPr>
+        <p:txBody>
+          <a:bodyPr wrap="square">
+            <a:spAutoFit/>
+          </a:bodyPr>
+          <a:lstStyle/>
+          <a:p>
+            <a:pPr algn="l"/>
+            <a:r>
+              <a:rPr sz="1200" b="1" i="0">
+                <a:solidFill>
+                  <a:srgbClr val="282838"/>
+                </a:solidFill>
+              </a:rPr>
+              <a:t>Configuration</a:t>
+            </a:r>
+          </a:p>
+        </p:txBody>
+      </p:sp>
+      <p:sp>
+        <p:nvSpPr>
+          <p:cNvPr id="28" name="TextBox 27"/>
+          <p:cNvSpPr txBox="1"/>
+          <p:nvPr/>
+        </p:nvSpPr>
+        <p:spPr>
+          <a:xfrm>
+            <a:off x="713232" y="4974336"/>
+            <a:ext cx="5120640" cy="310896"/>
+          </a:xfrm>
+          <a:prstGeom prst="rect">
+            <a:avLst/>
+          </a:prstGeom>
+          <a:noFill/>
+        </p:spPr>
+        <p:txBody>
+          <a:bodyPr wrap="square">
+            <a:spAutoFit/>
+          </a:bodyPr>
+          <a:lstStyle/>
+          <a:p>
+            <a:pPr algn="l"/>
+            <a:r>
+              <a:rPr sz="1000" b="0" i="1">
+                <a:solidFill>
+                  <a:srgbClr val="666677"/>
+                </a:solidFill>
+              </a:rPr>
+              <a:t>Production-safe defaults enforced</a:t>
+            </a:r>
+          </a:p>
+        </p:txBody>
+      </p:sp>
+      <p:sp>
+        <p:nvSpPr>
+          <p:cNvPr id="29" name="Rectangle 28"/>
+          <p:cNvSpPr/>
+          <p:nvPr/>
+        </p:nvSpPr>
+        <p:spPr>
+          <a:xfrm>
+            <a:off x="420624" y="5468112"/>
+            <a:ext cx="219456" cy="219456"/>
+          </a:xfrm>
+          <a:prstGeom prst="rect">
+            <a:avLst/>
+          </a:prstGeom>
+          <a:solidFill>
+            <a:srgbClr val="27AE60"/>
+          </a:solidFill>
+          <a:ln>
+            <a:noFill/>
+          </a:ln>
+        </p:spPr>
+        <p:style>
+          <a:lnRef idx="1">
+            <a:schemeClr val="accent1"/>
+          </a:lnRef>
+          <a:fillRef idx="3">
+            <a:schemeClr val="accent1"/>
+          </a:fillRef>
+          <a:effectRef idx="2">
+            <a:schemeClr val="accent1"/>
+          </a:effectRef>
+          <a:fontRef idx="minor">
+            <a:schemeClr val="lt1"/>
+          </a:fontRef>
+        </p:style>
+        <p:txBody>
+          <a:bodyPr rtlCol="0" anchor="ctr"/>
+          <a:lstStyle/>
+          <a:p>
+            <a:pPr algn="ctr"/>
+          </a:p>
+        </p:txBody>
+      </p:sp>
+      <p:sp>
+        <p:nvSpPr>
+          <p:cNvPr id="30" name="TextBox 29"/>
+          <p:cNvSpPr txBox="1"/>
+          <p:nvPr/>
+        </p:nvSpPr>
+        <p:spPr>
+          <a:xfrm>
+            <a:off x="457200" y="5440680"/>
+            <a:ext cx="146304" cy="274320"/>
+          </a:xfrm>
+          <a:prstGeom prst="rect">
+            <a:avLst/>
+          </a:prstGeom>
+          <a:noFill/>
+        </p:spPr>
+        <p:txBody>
+          <a:bodyPr wrap="square">
+            <a:spAutoFit/>
+          </a:bodyPr>
+          <a:lstStyle/>
+          <a:p>
+            <a:pPr algn="ctr"/>
+            <a:r>
+              <a:rPr sz="1400" b="1" i="0">
+                <a:solidFill>
+                  <a:srgbClr val="FFFFFF"/>
+                </a:solidFill>
+              </a:rPr>
+              <a:t>✓</a:t>
+            </a:r>
+          </a:p>
+        </p:txBody>
+      </p:sp>
+      <p:sp>
+        <p:nvSpPr>
+          <p:cNvPr id="31" name="TextBox 30"/>
+          <p:cNvSpPr txBox="1"/>
+          <p:nvPr/>
+        </p:nvSpPr>
+        <p:spPr>
+          <a:xfrm>
+            <a:off x="713232" y="5422392"/>
+            <a:ext cx="2377440" cy="274320"/>
+          </a:xfrm>
+          <a:prstGeom prst="rect">
+            <a:avLst/>
+          </a:prstGeom>
+          <a:noFill/>
+        </p:spPr>
+        <p:txBody>
+          <a:bodyPr wrap="square">
+            <a:spAutoFit/>
+          </a:bodyPr>
+          <a:lstStyle/>
+          <a:p>
+            <a:pPr algn="l"/>
+            <a:r>
+              <a:rPr sz="1200" b="1" i="0">
+                <a:solidFill>
+                  <a:srgbClr val="282838"/>
+                </a:solidFill>
+              </a:rPr>
+              <a:t>Models &amp; Data</a:t>
+            </a:r>
+          </a:p>
+        </p:txBody>
+      </p:sp>
+      <p:sp>
+        <p:nvSpPr>
+          <p:cNvPr id="32" name="TextBox 31"/>
+          <p:cNvSpPr txBox="1"/>
+          <p:nvPr/>
+        </p:nvSpPr>
+        <p:spPr>
+          <a:xfrm>
+            <a:off x="713232" y="5696712"/>
+            <a:ext cx="5120640" cy="310896"/>
+          </a:xfrm>
+          <a:prstGeom prst="rect">
+            <a:avLst/>
+          </a:prstGeom>
+          <a:noFill/>
+        </p:spPr>
+        <p:txBody>
+          <a:bodyPr wrap="square">
+            <a:spAutoFit/>
+          </a:bodyPr>
+          <a:lstStyle/>
+          <a:p>
+            <a:pPr algn="l"/>
+            <a:r>
+              <a:rPr sz="1000" b="0" i="1">
+                <a:solidFill>
+                  <a:srgbClr val="666677"/>
+                </a:solidFill>
+              </a:rPr>
+              <a:t>All files present and loaded</a:t>
+            </a:r>
+          </a:p>
+        </p:txBody>
+      </p:sp>
+      <p:sp>
+        <p:nvSpPr>
+          <p:cNvPr id="33" name="Rectangle 32"/>
+          <p:cNvSpPr/>
+          <p:nvPr/>
+        </p:nvSpPr>
+        <p:spPr>
+          <a:xfrm>
+            <a:off x="6473952" y="1261872"/>
+            <a:ext cx="5413248" cy="5358384"/>
           </a:xfrm>
           <a:prstGeom prst="rect">
             <a:avLst/>
@@ -8198,102 +8351,700 @@
       </p:sp>
       <p:sp>
         <p:nvSpPr>
-          <p:cNvPr id="29" name="TextBox 28"/>
-          <p:cNvSpPr txBox="1"/>
-          <p:nvPr/>
-        </p:nvSpPr>
-        <p:spPr>
-          <a:xfrm>
-            <a:off x="320040" y="5742431"/>
-            <a:ext cx="493776" cy="493776"/>
-          </a:xfrm>
-          <a:prstGeom prst="rect">
-            <a:avLst/>
-          </a:prstGeom>
-          <a:noFill/>
-        </p:spPr>
-        <p:txBody>
-          <a:bodyPr wrap="square">
-            <a:spAutoFit/>
-          </a:bodyPr>
-          <a:lstStyle/>
-          <a:p>
-            <a:pPr algn="ctr"/>
-            <a:r>
-              <a:rPr sz="2600" b="1" i="0">
+          <p:cNvPr id="34" name="TextBox 33"/>
+          <p:cNvSpPr txBox="1"/>
+          <p:nvPr/>
+        </p:nvSpPr>
+        <p:spPr>
+          <a:xfrm>
+            <a:off x="6473952" y="1316736"/>
+            <a:ext cx="5413248" cy="347472"/>
+          </a:xfrm>
+          <a:prstGeom prst="rect">
+            <a:avLst/>
+          </a:prstGeom>
+          <a:noFill/>
+        </p:spPr>
+        <p:txBody>
+          <a:bodyPr wrap="square">
+            <a:spAutoFit/>
+          </a:bodyPr>
+          <a:lstStyle/>
+          <a:p>
+            <a:pPr algn="ctr"/>
+            <a:r>
+              <a:rPr sz="1300" b="1" i="0">
+                <a:solidFill>
+                  <a:srgbClr val="667EEA"/>
+                </a:solidFill>
+              </a:rPr>
+              <a:t>FINAL IMPROVEMENTS</a:t>
+            </a:r>
+          </a:p>
+        </p:txBody>
+      </p:sp>
+      <p:sp>
+        <p:nvSpPr>
+          <p:cNvPr id="35" name="Rectangle 34"/>
+          <p:cNvSpPr/>
+          <p:nvPr/>
+        </p:nvSpPr>
+        <p:spPr>
+          <a:xfrm>
+            <a:off x="6547104" y="1792224"/>
+            <a:ext cx="5266944" cy="658368"/>
+          </a:xfrm>
+          <a:prstGeom prst="rect">
+            <a:avLst/>
+          </a:prstGeom>
+          <a:solidFill>
+            <a:srgbClr val="222D62"/>
+          </a:solidFill>
+          <a:ln>
+            <a:noFill/>
+          </a:ln>
+        </p:spPr>
+        <p:style>
+          <a:lnRef idx="1">
+            <a:schemeClr val="accent1"/>
+          </a:lnRef>
+          <a:fillRef idx="3">
+            <a:schemeClr val="accent1"/>
+          </a:fillRef>
+          <a:effectRef idx="2">
+            <a:schemeClr val="accent1"/>
+          </a:effectRef>
+          <a:fontRef idx="minor">
+            <a:schemeClr val="lt1"/>
+          </a:fontRef>
+        </p:style>
+        <p:txBody>
+          <a:bodyPr rtlCol="0" anchor="ctr"/>
+          <a:lstStyle/>
+          <a:p>
+            <a:pPr algn="ctr"/>
+          </a:p>
+        </p:txBody>
+      </p:sp>
+      <p:sp>
+        <p:nvSpPr>
+          <p:cNvPr id="36" name="TextBox 35"/>
+          <p:cNvSpPr txBox="1"/>
+          <p:nvPr/>
+        </p:nvSpPr>
+        <p:spPr>
+          <a:xfrm>
+            <a:off x="6729984" y="1865376"/>
+            <a:ext cx="2743200" cy="256032"/>
+          </a:xfrm>
+          <a:prstGeom prst="rect">
+            <a:avLst/>
+          </a:prstGeom>
+          <a:noFill/>
+        </p:spPr>
+        <p:txBody>
+          <a:bodyPr wrap="square">
+            <a:spAutoFit/>
+          </a:bodyPr>
+          <a:lstStyle/>
+          <a:p>
+            <a:pPr algn="l"/>
+            <a:r>
+              <a:rPr sz="1200" b="1" i="0">
                 <a:solidFill>
                   <a:srgbClr val="FFFFFF"/>
                 </a:solidFill>
               </a:rPr>
-              <a:t>5</a:t>
-            </a:r>
-          </a:p>
-        </p:txBody>
-      </p:sp>
-      <p:sp>
-        <p:nvSpPr>
-          <p:cNvPr id="30" name="TextBox 29"/>
-          <p:cNvSpPr txBox="1"/>
-          <p:nvPr/>
-        </p:nvSpPr>
-        <p:spPr>
-          <a:xfrm>
-            <a:off x="950976" y="5596127"/>
-            <a:ext cx="6949440" cy="329184"/>
-          </a:xfrm>
-          <a:prstGeom prst="rect">
-            <a:avLst/>
-          </a:prstGeom>
-          <a:noFill/>
-        </p:spPr>
-        <p:txBody>
-          <a:bodyPr wrap="square">
-            <a:spAutoFit/>
-          </a:bodyPr>
-          <a:lstStyle/>
-          <a:p>
-            <a:pPr algn="l"/>
-            <a:r>
-              <a:rPr sz="1400" b="1" i="0">
-                <a:solidFill>
-                  <a:srgbClr val="1A234E"/>
-                </a:solidFill>
-              </a:rPr>
-              <a:t>Observability Is a Feature, Not an Afterthought</a:t>
-            </a:r>
-          </a:p>
-        </p:txBody>
-      </p:sp>
-      <p:sp>
-        <p:nvSpPr>
-          <p:cNvPr id="31" name="TextBox 30"/>
-          <p:cNvSpPr txBox="1"/>
-          <p:nvPr/>
-        </p:nvSpPr>
-        <p:spPr>
-          <a:xfrm>
-            <a:off x="950976" y="5961888"/>
-            <a:ext cx="10515600" cy="493776"/>
-          </a:xfrm>
-          <a:prstGeom prst="rect">
-            <a:avLst/>
-          </a:prstGeom>
-          <a:noFill/>
-        </p:spPr>
-        <p:txBody>
-          <a:bodyPr wrap="square">
-            <a:spAutoFit/>
-          </a:bodyPr>
-          <a:lstStyle/>
-          <a:p>
-            <a:pPr algn="l"/>
-            <a:r>
-              <a:rPr sz="1100" b="0" i="0">
-                <a:solidFill>
-                  <a:srgbClr val="282838"/>
-                </a:solidFill>
-              </a:rPr>
-              <a:t>Workflow events, audit traces, policy metadata, and the health endpoint transformed a black-box API into a debuggable, governable system — essential for a multi-developer group project.</a:t>
+              <a:t>Modern API Routing</a:t>
+            </a:r>
+          </a:p>
+        </p:txBody>
+      </p:sp>
+      <p:sp>
+        <p:nvSpPr>
+          <p:cNvPr id="37" name="TextBox 36"/>
+          <p:cNvSpPr txBox="1"/>
+          <p:nvPr/>
+        </p:nvSpPr>
+        <p:spPr>
+          <a:xfrm>
+            <a:off x="6729984" y="2139696"/>
+            <a:ext cx="4937760" cy="256032"/>
+          </a:xfrm>
+          <a:prstGeom prst="rect">
+            <a:avLst/>
+          </a:prstGeom>
+          <a:noFill/>
+        </p:spPr>
+        <p:txBody>
+          <a:bodyPr wrap="square">
+            <a:spAutoFit/>
+          </a:bodyPr>
+          <a:lstStyle/>
+          <a:p>
+            <a:pPr algn="l"/>
+            <a:r>
+              <a:rPr sz="900" b="0" i="1">
+                <a:solidFill>
+                  <a:srgbClr val="A0AEF5"/>
+                </a:solidFill>
+              </a:rPr>
+              <a:t>Legacy `/v1/*` unmapped → modern orchestration active</a:t>
+            </a:r>
+          </a:p>
+        </p:txBody>
+      </p:sp>
+      <p:sp>
+        <p:nvSpPr>
+          <p:cNvPr id="38" name="Rectangle 37"/>
+          <p:cNvSpPr/>
+          <p:nvPr/>
+        </p:nvSpPr>
+        <p:spPr>
+          <a:xfrm>
+            <a:off x="6547104" y="2514600"/>
+            <a:ext cx="5266944" cy="658368"/>
+          </a:xfrm>
+          <a:prstGeom prst="rect">
+            <a:avLst/>
+          </a:prstGeom>
+          <a:solidFill>
+            <a:srgbClr val="222D62"/>
+          </a:solidFill>
+          <a:ln>
+            <a:noFill/>
+          </a:ln>
+        </p:spPr>
+        <p:style>
+          <a:lnRef idx="1">
+            <a:schemeClr val="accent1"/>
+          </a:lnRef>
+          <a:fillRef idx="3">
+            <a:schemeClr val="accent1"/>
+          </a:fillRef>
+          <a:effectRef idx="2">
+            <a:schemeClr val="accent1"/>
+          </a:effectRef>
+          <a:fontRef idx="minor">
+            <a:schemeClr val="lt1"/>
+          </a:fontRef>
+        </p:style>
+        <p:txBody>
+          <a:bodyPr rtlCol="0" anchor="ctr"/>
+          <a:lstStyle/>
+          <a:p>
+            <a:pPr algn="ctr"/>
+          </a:p>
+        </p:txBody>
+      </p:sp>
+      <p:sp>
+        <p:nvSpPr>
+          <p:cNvPr id="39" name="TextBox 38"/>
+          <p:cNvSpPr txBox="1"/>
+          <p:nvPr/>
+        </p:nvSpPr>
+        <p:spPr>
+          <a:xfrm>
+            <a:off x="6729984" y="2587752"/>
+            <a:ext cx="2743200" cy="256032"/>
+          </a:xfrm>
+          <a:prstGeom prst="rect">
+            <a:avLst/>
+          </a:prstGeom>
+          <a:noFill/>
+        </p:spPr>
+        <p:txBody>
+          <a:bodyPr wrap="square">
+            <a:spAutoFit/>
+          </a:bodyPr>
+          <a:lstStyle/>
+          <a:p>
+            <a:pPr algn="l"/>
+            <a:r>
+              <a:rPr sz="1200" b="1" i="0">
+                <a:solidFill>
+                  <a:srgbClr val="FFFFFF"/>
+                </a:solidFill>
+              </a:rPr>
+              <a:t>UI Feature Badges</a:t>
+            </a:r>
+          </a:p>
+        </p:txBody>
+      </p:sp>
+      <p:sp>
+        <p:nvSpPr>
+          <p:cNvPr id="40" name="TextBox 39"/>
+          <p:cNvSpPr txBox="1"/>
+          <p:nvPr/>
+        </p:nvSpPr>
+        <p:spPr>
+          <a:xfrm>
+            <a:off x="6729984" y="2862072"/>
+            <a:ext cx="4937760" cy="256032"/>
+          </a:xfrm>
+          <a:prstGeom prst="rect">
+            <a:avLst/>
+          </a:prstGeom>
+          <a:noFill/>
+        </p:spPr>
+        <p:txBody>
+          <a:bodyPr wrap="square">
+            <a:spAutoFit/>
+          </a:bodyPr>
+          <a:lstStyle/>
+          <a:p>
+            <a:pPr algn="l"/>
+            <a:r>
+              <a:rPr sz="900" b="0" i="1">
+                <a:solidFill>
+                  <a:srgbClr val="A0AEF5"/>
+                </a:solidFill>
+              </a:rPr>
+              <a:t>Live provider data marked with source labels + styling</a:t>
+            </a:r>
+          </a:p>
+        </p:txBody>
+      </p:sp>
+      <p:sp>
+        <p:nvSpPr>
+          <p:cNvPr id="41" name="Rectangle 40"/>
+          <p:cNvSpPr/>
+          <p:nvPr/>
+        </p:nvSpPr>
+        <p:spPr>
+          <a:xfrm>
+            <a:off x="6547104" y="3236976"/>
+            <a:ext cx="5266944" cy="658368"/>
+          </a:xfrm>
+          <a:prstGeom prst="rect">
+            <a:avLst/>
+          </a:prstGeom>
+          <a:solidFill>
+            <a:srgbClr val="222D62"/>
+          </a:solidFill>
+          <a:ln>
+            <a:noFill/>
+          </a:ln>
+        </p:spPr>
+        <p:style>
+          <a:lnRef idx="1">
+            <a:schemeClr val="accent1"/>
+          </a:lnRef>
+          <a:fillRef idx="3">
+            <a:schemeClr val="accent1"/>
+          </a:fillRef>
+          <a:effectRef idx="2">
+            <a:schemeClr val="accent1"/>
+          </a:effectRef>
+          <a:fontRef idx="minor">
+            <a:schemeClr val="lt1"/>
+          </a:fontRef>
+        </p:style>
+        <p:txBody>
+          <a:bodyPr rtlCol="0" anchor="ctr"/>
+          <a:lstStyle/>
+          <a:p>
+            <a:pPr algn="ctr"/>
+          </a:p>
+        </p:txBody>
+      </p:sp>
+      <p:sp>
+        <p:nvSpPr>
+          <p:cNvPr id="42" name="TextBox 41"/>
+          <p:cNvSpPr txBox="1"/>
+          <p:nvPr/>
+        </p:nvSpPr>
+        <p:spPr>
+          <a:xfrm>
+            <a:off x="6729984" y="3310128"/>
+            <a:ext cx="2743200" cy="256032"/>
+          </a:xfrm>
+          <a:prstGeom prst="rect">
+            <a:avLst/>
+          </a:prstGeom>
+          <a:noFill/>
+        </p:spPr>
+        <p:txBody>
+          <a:bodyPr wrap="square">
+            <a:spAutoFit/>
+          </a:bodyPr>
+          <a:lstStyle/>
+          <a:p>
+            <a:pPr algn="l"/>
+            <a:r>
+              <a:rPr sz="1200" b="1" i="0">
+                <a:solidFill>
+                  <a:srgbClr val="FFFFFF"/>
+                </a:solidFill>
+              </a:rPr>
+              <a:t>Smart Calibration</a:t>
+            </a:r>
+          </a:p>
+        </p:txBody>
+      </p:sp>
+      <p:sp>
+        <p:nvSpPr>
+          <p:cNvPr id="43" name="TextBox 42"/>
+          <p:cNvSpPr txBox="1"/>
+          <p:nvPr/>
+        </p:nvSpPr>
+        <p:spPr>
+          <a:xfrm>
+            <a:off x="6729984" y="3584448"/>
+            <a:ext cx="4937760" cy="256032"/>
+          </a:xfrm>
+          <a:prstGeom prst="rect">
+            <a:avLst/>
+          </a:prstGeom>
+          <a:noFill/>
+        </p:spPr>
+        <p:txBody>
+          <a:bodyPr wrap="square">
+            <a:spAutoFit/>
+          </a:bodyPr>
+          <a:lstStyle/>
+          <a:p>
+            <a:pPr algn="l"/>
+            <a:r>
+              <a:rPr sz="900" b="0" i="1">
+                <a:solidFill>
+                  <a:srgbClr val="A0AEF5"/>
+                </a:solidFill>
+              </a:rPr>
+              <a:t>All 50 states have valid multipliers; local evidence-based</a:t>
+            </a:r>
+          </a:p>
+        </p:txBody>
+      </p:sp>
+      <p:sp>
+        <p:nvSpPr>
+          <p:cNvPr id="44" name="Rectangle 43"/>
+          <p:cNvSpPr/>
+          <p:nvPr/>
+        </p:nvSpPr>
+        <p:spPr>
+          <a:xfrm>
+            <a:off x="6547104" y="3959352"/>
+            <a:ext cx="5266944" cy="658368"/>
+          </a:xfrm>
+          <a:prstGeom prst="rect">
+            <a:avLst/>
+          </a:prstGeom>
+          <a:solidFill>
+            <a:srgbClr val="222D62"/>
+          </a:solidFill>
+          <a:ln>
+            <a:noFill/>
+          </a:ln>
+        </p:spPr>
+        <p:style>
+          <a:lnRef idx="1">
+            <a:schemeClr val="accent1"/>
+          </a:lnRef>
+          <a:fillRef idx="3">
+            <a:schemeClr val="accent1"/>
+          </a:fillRef>
+          <a:effectRef idx="2">
+            <a:schemeClr val="accent1"/>
+          </a:effectRef>
+          <a:fontRef idx="minor">
+            <a:schemeClr val="lt1"/>
+          </a:fontRef>
+        </p:style>
+        <p:txBody>
+          <a:bodyPr rtlCol="0" anchor="ctr"/>
+          <a:lstStyle/>
+          <a:p>
+            <a:pPr algn="ctr"/>
+          </a:p>
+        </p:txBody>
+      </p:sp>
+      <p:sp>
+        <p:nvSpPr>
+          <p:cNvPr id="45" name="TextBox 44"/>
+          <p:cNvSpPr txBox="1"/>
+          <p:nvPr/>
+        </p:nvSpPr>
+        <p:spPr>
+          <a:xfrm>
+            <a:off x="6729984" y="4032504"/>
+            <a:ext cx="2743200" cy="256032"/>
+          </a:xfrm>
+          <a:prstGeom prst="rect">
+            <a:avLst/>
+          </a:prstGeom>
+          <a:noFill/>
+        </p:spPr>
+        <p:txBody>
+          <a:bodyPr wrap="square">
+            <a:spAutoFit/>
+          </a:bodyPr>
+          <a:lstStyle/>
+          <a:p>
+            <a:pPr algn="l"/>
+            <a:r>
+              <a:rPr sz="1200" b="1" i="0">
+                <a:solidFill>
+                  <a:srgbClr val="FFFFFF"/>
+                </a:solidFill>
+              </a:rPr>
+              <a:t>Database Migrations</a:t>
+            </a:r>
+          </a:p>
+        </p:txBody>
+      </p:sp>
+      <p:sp>
+        <p:nvSpPr>
+          <p:cNvPr id="46" name="TextBox 45"/>
+          <p:cNvSpPr txBox="1"/>
+          <p:nvPr/>
+        </p:nvSpPr>
+        <p:spPr>
+          <a:xfrm>
+            <a:off x="6729984" y="4306824"/>
+            <a:ext cx="4937760" cy="256032"/>
+          </a:xfrm>
+          <a:prstGeom prst="rect">
+            <a:avLst/>
+          </a:prstGeom>
+          <a:noFill/>
+        </p:spPr>
+        <p:txBody>
+          <a:bodyPr wrap="square">
+            <a:spAutoFit/>
+          </a:bodyPr>
+          <a:lstStyle/>
+          <a:p>
+            <a:pPr algn="l"/>
+            <a:r>
+              <a:rPr sz="900" b="0" i="1">
+                <a:solidFill>
+                  <a:srgbClr val="A0AEF5"/>
+                </a:solidFill>
+              </a:rPr>
+              <a:t>8 revisions locked; workflow_events table + indices</a:t>
+            </a:r>
+          </a:p>
+        </p:txBody>
+      </p:sp>
+      <p:sp>
+        <p:nvSpPr>
+          <p:cNvPr id="47" name="Rectangle 46"/>
+          <p:cNvSpPr/>
+          <p:nvPr/>
+        </p:nvSpPr>
+        <p:spPr>
+          <a:xfrm>
+            <a:off x="6547104" y="4681728"/>
+            <a:ext cx="5266944" cy="658368"/>
+          </a:xfrm>
+          <a:prstGeom prst="rect">
+            <a:avLst/>
+          </a:prstGeom>
+          <a:solidFill>
+            <a:srgbClr val="222D62"/>
+          </a:solidFill>
+          <a:ln>
+            <a:noFill/>
+          </a:ln>
+        </p:spPr>
+        <p:style>
+          <a:lnRef idx="1">
+            <a:schemeClr val="accent1"/>
+          </a:lnRef>
+          <a:fillRef idx="3">
+            <a:schemeClr val="accent1"/>
+          </a:fillRef>
+          <a:effectRef idx="2">
+            <a:schemeClr val="accent1"/>
+          </a:effectRef>
+          <a:fontRef idx="minor">
+            <a:schemeClr val="lt1"/>
+          </a:fontRef>
+        </p:style>
+        <p:txBody>
+          <a:bodyPr rtlCol="0" anchor="ctr"/>
+          <a:lstStyle/>
+          <a:p>
+            <a:pPr algn="ctr"/>
+          </a:p>
+        </p:txBody>
+      </p:sp>
+      <p:sp>
+        <p:nvSpPr>
+          <p:cNvPr id="48" name="TextBox 47"/>
+          <p:cNvSpPr txBox="1"/>
+          <p:nvPr/>
+        </p:nvSpPr>
+        <p:spPr>
+          <a:xfrm>
+            <a:off x="6729984" y="4754880"/>
+            <a:ext cx="2743200" cy="256032"/>
+          </a:xfrm>
+          <a:prstGeom prst="rect">
+            <a:avLst/>
+          </a:prstGeom>
+          <a:noFill/>
+        </p:spPr>
+        <p:txBody>
+          <a:bodyPr wrap="square">
+            <a:spAutoFit/>
+          </a:bodyPr>
+          <a:lstStyle/>
+          <a:p>
+            <a:pPr algn="l"/>
+            <a:r>
+              <a:rPr sz="1200" b="1" i="0">
+                <a:solidFill>
+                  <a:srgbClr val="FFFFFF"/>
+                </a:solidFill>
+              </a:rPr>
+              <a:t>Schema Drift Fixed</a:t>
+            </a:r>
+          </a:p>
+        </p:txBody>
+      </p:sp>
+      <p:sp>
+        <p:nvSpPr>
+          <p:cNvPr id="49" name="TextBox 48"/>
+          <p:cNvSpPr txBox="1"/>
+          <p:nvPr/>
+        </p:nvSpPr>
+        <p:spPr>
+          <a:xfrm>
+            <a:off x="6729984" y="5029200"/>
+            <a:ext cx="4937760" cy="256032"/>
+          </a:xfrm>
+          <a:prstGeom prst="rect">
+            <a:avLst/>
+          </a:prstGeom>
+          <a:noFill/>
+        </p:spPr>
+        <p:txBody>
+          <a:bodyPr wrap="square">
+            <a:spAutoFit/>
+          </a:bodyPr>
+          <a:lstStyle/>
+          <a:p>
+            <a:pPr algn="l"/>
+            <a:r>
+              <a:rPr sz="900" b="0" i="1">
+                <a:solidFill>
+                  <a:srgbClr val="A0AEF5"/>
+                </a:solidFill>
+              </a:rPr>
+              <a:t>Alembic migration-first prevents 500 errors</a:t>
+            </a:r>
+          </a:p>
+        </p:txBody>
+      </p:sp>
+      <p:sp>
+        <p:nvSpPr>
+          <p:cNvPr id="50" name="Rectangle 49"/>
+          <p:cNvSpPr/>
+          <p:nvPr/>
+        </p:nvSpPr>
+        <p:spPr>
+          <a:xfrm>
+            <a:off x="6547104" y="5404104"/>
+            <a:ext cx="5266944" cy="658368"/>
+          </a:xfrm>
+          <a:prstGeom prst="rect">
+            <a:avLst/>
+          </a:prstGeom>
+          <a:solidFill>
+            <a:srgbClr val="222D62"/>
+          </a:solidFill>
+          <a:ln>
+            <a:noFill/>
+          </a:ln>
+        </p:spPr>
+        <p:style>
+          <a:lnRef idx="1">
+            <a:schemeClr val="accent1"/>
+          </a:lnRef>
+          <a:fillRef idx="3">
+            <a:schemeClr val="accent1"/>
+          </a:fillRef>
+          <a:effectRef idx="2">
+            <a:schemeClr val="accent1"/>
+          </a:effectRef>
+          <a:fontRef idx="minor">
+            <a:schemeClr val="lt1"/>
+          </a:fontRef>
+        </p:style>
+        <p:txBody>
+          <a:bodyPr rtlCol="0" anchor="ctr"/>
+          <a:lstStyle/>
+          <a:p>
+            <a:pPr algn="ctr"/>
+          </a:p>
+        </p:txBody>
+      </p:sp>
+      <p:sp>
+        <p:nvSpPr>
+          <p:cNvPr id="51" name="TextBox 50"/>
+          <p:cNvSpPr txBox="1"/>
+          <p:nvPr/>
+        </p:nvSpPr>
+        <p:spPr>
+          <a:xfrm>
+            <a:off x="6729984" y="5477256"/>
+            <a:ext cx="2743200" cy="256032"/>
+          </a:xfrm>
+          <a:prstGeom prst="rect">
+            <a:avLst/>
+          </a:prstGeom>
+          <a:noFill/>
+        </p:spPr>
+        <p:txBody>
+          <a:bodyPr wrap="square">
+            <a:spAutoFit/>
+          </a:bodyPr>
+          <a:lstStyle/>
+          <a:p>
+            <a:pPr algn="l"/>
+            <a:r>
+              <a:rPr sz="1200" b="1" i="0">
+                <a:solidFill>
+                  <a:srgbClr val="FFFFFF"/>
+                </a:solidFill>
+              </a:rPr>
+              <a:t>Live Prediction Flow</a:t>
+            </a:r>
+          </a:p>
+        </p:txBody>
+      </p:sp>
+      <p:sp>
+        <p:nvSpPr>
+          <p:cNvPr id="52" name="TextBox 51"/>
+          <p:cNvSpPr txBox="1"/>
+          <p:nvPr/>
+        </p:nvSpPr>
+        <p:spPr>
+          <a:xfrm>
+            <a:off x="6729984" y="5751576"/>
+            <a:ext cx="4937760" cy="256032"/>
+          </a:xfrm>
+          <a:prstGeom prst="rect">
+            <a:avLst/>
+          </a:prstGeom>
+          <a:noFill/>
+        </p:spPr>
+        <p:txBody>
+          <a:bodyPr wrap="square">
+            <a:spAutoFit/>
+          </a:bodyPr>
+          <a:lstStyle/>
+          <a:p>
+            <a:pPr algn="l"/>
+            <a:r>
+              <a:rPr sz="900" b="0" i="1">
+                <a:solidFill>
+                  <a:srgbClr val="A0AEF5"/>
+                </a:solidFill>
+              </a:rPr>
+              <a:t>RentCast → Census → Nominatim → Heuristic fallback</a:t>
             </a:r>
           </a:p>
         </p:txBody>
@@ -8331,6 +9082,49 @@
             <a:avLst/>
           </a:prstGeom>
           <a:solidFill>
+            <a:srgbClr val="EFF1F7"/>
+          </a:solidFill>
+          <a:ln>
+            <a:noFill/>
+          </a:ln>
+        </p:spPr>
+        <p:style>
+          <a:lnRef idx="1">
+            <a:schemeClr val="accent1"/>
+          </a:lnRef>
+          <a:fillRef idx="3">
+            <a:schemeClr val="accent1"/>
+          </a:fillRef>
+          <a:effectRef idx="2">
+            <a:schemeClr val="accent1"/>
+          </a:effectRef>
+          <a:fontRef idx="minor">
+            <a:schemeClr val="lt1"/>
+          </a:fontRef>
+        </p:style>
+        <p:txBody>
+          <a:bodyPr rtlCol="0" anchor="ctr"/>
+          <a:lstStyle/>
+          <a:p>
+            <a:pPr algn="ctr"/>
+          </a:p>
+        </p:txBody>
+      </p:sp>
+      <p:sp>
+        <p:nvSpPr>
+          <p:cNvPr id="3" name="Rectangle 2"/>
+          <p:cNvSpPr/>
+          <p:nvPr/>
+        </p:nvSpPr>
+        <p:spPr>
+          <a:xfrm>
+            <a:off x="0" y="0"/>
+            <a:ext cx="12188952" cy="1097280"/>
+          </a:xfrm>
+          <a:prstGeom prst="rect">
+            <a:avLst/>
+          </a:prstGeom>
+          <a:solidFill>
             <a:srgbClr val="1A234E"/>
           </a:solidFill>
           <a:ln>
@@ -8361,14 +9155,14 @@
       </p:sp>
       <p:sp>
         <p:nvSpPr>
-          <p:cNvPr id="3" name="Rectangle 2"/>
+          <p:cNvPr id="4" name="Rectangle 3"/>
           <p:cNvSpPr/>
           <p:nvPr/>
         </p:nvSpPr>
         <p:spPr>
           <a:xfrm>
-            <a:off x="0" y="0"/>
-            <a:ext cx="12188952" cy="146304"/>
+            <a:off x="0" y="1097280"/>
+            <a:ext cx="12188952" cy="54864"/>
           </a:xfrm>
           <a:prstGeom prst="rect">
             <a:avLst/>
@@ -8404,14 +9198,125 @@
       </p:sp>
       <p:sp>
         <p:nvSpPr>
-          <p:cNvPr id="4" name="Rectangle 3"/>
+          <p:cNvPr id="5" name="TextBox 4"/>
+          <p:cNvSpPr txBox="1"/>
+          <p:nvPr/>
+        </p:nvSpPr>
+        <p:spPr>
+          <a:xfrm>
+            <a:off x="320040" y="73152"/>
+            <a:ext cx="11521440" cy="658368"/>
+          </a:xfrm>
+          <a:prstGeom prst="rect">
+            <a:avLst/>
+          </a:prstGeom>
+          <a:noFill/>
+        </p:spPr>
+        <p:txBody>
+          <a:bodyPr wrap="square">
+            <a:spAutoFit/>
+          </a:bodyPr>
+          <a:lstStyle/>
+          <a:p>
+            <a:pPr algn="l"/>
+            <a:r>
+              <a:rPr sz="2600" b="1" i="0">
+                <a:solidFill>
+                  <a:srgbClr val="FFFFFF"/>
+                </a:solidFill>
+              </a:rPr>
+              <a:t>Key Learnings</a:t>
+            </a:r>
+          </a:p>
+        </p:txBody>
+      </p:sp>
+      <p:sp>
+        <p:nvSpPr>
+          <p:cNvPr id="6" name="TextBox 5"/>
+          <p:cNvSpPr txBox="1"/>
+          <p:nvPr/>
+        </p:nvSpPr>
+        <p:spPr>
+          <a:xfrm>
+            <a:off x="320040" y="676656"/>
+            <a:ext cx="11521440" cy="365760"/>
+          </a:xfrm>
+          <a:prstGeom prst="rect">
+            <a:avLst/>
+          </a:prstGeom>
+          <a:noFill/>
+        </p:spPr>
+        <p:txBody>
+          <a:bodyPr wrap="square">
+            <a:spAutoFit/>
+          </a:bodyPr>
+          <a:lstStyle/>
+          <a:p>
+            <a:pPr algn="l"/>
+            <a:r>
+              <a:rPr sz="1200" b="0" i="1">
+                <a:solidFill>
+                  <a:srgbClr val="A0AEF5"/>
+                </a:solidFill>
+              </a:rPr>
+              <a:t>What we would tell our past selves</a:t>
+            </a:r>
+          </a:p>
+        </p:txBody>
+      </p:sp>
+      <p:sp>
+        <p:nvSpPr>
+          <p:cNvPr id="7" name="Rectangle 6"/>
           <p:cNvSpPr/>
           <p:nvPr/>
         </p:nvSpPr>
         <p:spPr>
           <a:xfrm>
-            <a:off x="0" y="6711696"/>
-            <a:ext cx="12188952" cy="146304"/>
+            <a:off x="320040" y="1261872"/>
+            <a:ext cx="11539728" cy="969264"/>
+          </a:xfrm>
+          <a:prstGeom prst="rect">
+            <a:avLst/>
+          </a:prstGeom>
+          <a:solidFill>
+            <a:srgbClr val="FFFFFF"/>
+          </a:solidFill>
+          <a:ln>
+            <a:noFill/>
+          </a:ln>
+        </p:spPr>
+        <p:style>
+          <a:lnRef idx="1">
+            <a:schemeClr val="accent1"/>
+          </a:lnRef>
+          <a:fillRef idx="3">
+            <a:schemeClr val="accent1"/>
+          </a:fillRef>
+          <a:effectRef idx="2">
+            <a:schemeClr val="accent1"/>
+          </a:effectRef>
+          <a:fontRef idx="minor">
+            <a:schemeClr val="lt1"/>
+          </a:fontRef>
+        </p:style>
+        <p:txBody>
+          <a:bodyPr rtlCol="0" anchor="ctr"/>
+          <a:lstStyle/>
+          <a:p>
+            <a:pPr algn="ctr"/>
+          </a:p>
+        </p:txBody>
+      </p:sp>
+      <p:sp>
+        <p:nvSpPr>
+          <p:cNvPr id="8" name="Rectangle 7"/>
+          <p:cNvSpPr/>
+          <p:nvPr/>
+        </p:nvSpPr>
+        <p:spPr>
+          <a:xfrm>
+            <a:off x="320040" y="1261872"/>
+            <a:ext cx="493776" cy="969264"/>
           </a:xfrm>
           <a:prstGeom prst="rect">
             <a:avLst/>
@@ -8447,82 +9352,929 @@
       </p:sp>
       <p:sp>
         <p:nvSpPr>
-          <p:cNvPr id="5" name="TextBox 4"/>
-          <p:cNvSpPr txBox="1"/>
-          <p:nvPr/>
-        </p:nvSpPr>
-        <p:spPr>
-          <a:xfrm>
-            <a:off x="914400" y="1691640"/>
-            <a:ext cx="10360152" cy="1097280"/>
-          </a:xfrm>
-          <a:prstGeom prst="rect">
-            <a:avLst/>
-          </a:prstGeom>
-          <a:noFill/>
-        </p:spPr>
-        <p:txBody>
-          <a:bodyPr wrap="square">
-            <a:spAutoFit/>
-          </a:bodyPr>
-          <a:lstStyle/>
-          <a:p>
-            <a:pPr algn="ctr"/>
-            <a:r>
-              <a:rPr sz="5600" b="1" i="0">
+          <p:cNvPr id="9" name="TextBox 8"/>
+          <p:cNvSpPr txBox="1"/>
+          <p:nvPr/>
+        </p:nvSpPr>
+        <p:spPr>
+          <a:xfrm>
+            <a:off x="320040" y="1463039"/>
+            <a:ext cx="493776" cy="493776"/>
+          </a:xfrm>
+          <a:prstGeom prst="rect">
+            <a:avLst/>
+          </a:prstGeom>
+          <a:noFill/>
+        </p:spPr>
+        <p:txBody>
+          <a:bodyPr wrap="square">
+            <a:spAutoFit/>
+          </a:bodyPr>
+          <a:lstStyle/>
+          <a:p>
+            <a:pPr algn="ctr"/>
+            <a:r>
+              <a:rPr sz="2600" b="1" i="0">
                 <a:solidFill>
                   <a:srgbClr val="FFFFFF"/>
                 </a:solidFill>
               </a:rPr>
-              <a:t>Thank You</a:t>
-            </a:r>
-          </a:p>
-        </p:txBody>
-      </p:sp>
-      <p:sp>
-        <p:nvSpPr>
-          <p:cNvPr id="6" name="TextBox 5"/>
-          <p:cNvSpPr txBox="1"/>
-          <p:nvPr/>
-        </p:nvSpPr>
-        <p:spPr>
-          <a:xfrm>
-            <a:off x="914400" y="2834640"/>
-            <a:ext cx="10360152" cy="603504"/>
-          </a:xfrm>
-          <a:prstGeom prst="rect">
-            <a:avLst/>
-          </a:prstGeom>
-          <a:noFill/>
-        </p:spPr>
-        <p:txBody>
-          <a:bodyPr wrap="square">
-            <a:spAutoFit/>
-          </a:bodyPr>
-          <a:lstStyle/>
-          <a:p>
-            <a:pPr algn="ctr"/>
-            <a:r>
-              <a:rPr sz="2400" b="0" i="0">
-                <a:solidFill>
-                  <a:srgbClr val="A0AEF5"/>
-                </a:solidFill>
-              </a:rPr>
-              <a:t>Questions &amp; Discussion</a:t>
-            </a:r>
-          </a:p>
-        </p:txBody>
-      </p:sp>
-      <p:sp>
-        <p:nvSpPr>
-          <p:cNvPr id="7" name="Rectangle 6"/>
+              <a:t>1</a:t>
+            </a:r>
+          </a:p>
+        </p:txBody>
+      </p:sp>
+      <p:sp>
+        <p:nvSpPr>
+          <p:cNvPr id="10" name="TextBox 9"/>
+          <p:cNvSpPr txBox="1"/>
+          <p:nvPr/>
+        </p:nvSpPr>
+        <p:spPr>
+          <a:xfrm>
+            <a:off x="950976" y="1316736"/>
+            <a:ext cx="6949440" cy="329184"/>
+          </a:xfrm>
+          <a:prstGeom prst="rect">
+            <a:avLst/>
+          </a:prstGeom>
+          <a:noFill/>
+        </p:spPr>
+        <p:txBody>
+          <a:bodyPr wrap="square">
+            <a:spAutoFit/>
+          </a:bodyPr>
+          <a:lstStyle/>
+          <a:p>
+            <a:pPr algn="l"/>
+            <a:r>
+              <a:rPr sz="1400" b="1" i="0">
+                <a:solidFill>
+                  <a:srgbClr val="1A234E"/>
+                </a:solidFill>
+              </a:rPr>
+              <a:t>Feature Generalisation Beats Local Accuracy</a:t>
+            </a:r>
+          </a:p>
+        </p:txBody>
+      </p:sp>
+      <p:sp>
+        <p:nvSpPr>
+          <p:cNvPr id="11" name="TextBox 10"/>
+          <p:cNvSpPr txBox="1"/>
+          <p:nvPr/>
+        </p:nvSpPr>
+        <p:spPr>
+          <a:xfrm>
+            <a:off x="950976" y="1682495"/>
+            <a:ext cx="10515600" cy="493776"/>
+          </a:xfrm>
+          <a:prstGeom prst="rect">
+            <a:avLst/>
+          </a:prstGeom>
+          <a:noFill/>
+        </p:spPr>
+        <p:txBody>
+          <a:bodyPr wrap="square">
+            <a:spAutoFit/>
+          </a:bodyPr>
+          <a:lstStyle/>
+          <a:p>
+            <a:pPr algn="l"/>
+            <a:r>
+              <a:rPr sz="1100" b="0" i="0">
+                <a:solidFill>
+                  <a:srgbClr val="282838"/>
+                </a:solidFill>
+              </a:rPr>
+              <a:t>A Census ACS5-backed model generalising to all US addresses outperforms one fine-tuned for a single city. Remove local OHE columns early — they are silent zero-signal failure modes at national inference time.</a:t>
+            </a:r>
+          </a:p>
+        </p:txBody>
+      </p:sp>
+      <p:sp>
+        <p:nvSpPr>
+          <p:cNvPr id="12" name="Rectangle 11"/>
           <p:cNvSpPr/>
           <p:nvPr/>
         </p:nvSpPr>
         <p:spPr>
           <a:xfrm>
-            <a:off x="2560320" y="3584448"/>
-            <a:ext cx="7068312" cy="64008"/>
+            <a:off x="320040" y="2331720"/>
+            <a:ext cx="11539728" cy="969264"/>
+          </a:xfrm>
+          <a:prstGeom prst="rect">
+            <a:avLst/>
+          </a:prstGeom>
+          <a:solidFill>
+            <a:srgbClr val="FFFFFF"/>
+          </a:solidFill>
+          <a:ln>
+            <a:noFill/>
+          </a:ln>
+        </p:spPr>
+        <p:style>
+          <a:lnRef idx="1">
+            <a:schemeClr val="accent1"/>
+          </a:lnRef>
+          <a:fillRef idx="3">
+            <a:schemeClr val="accent1"/>
+          </a:fillRef>
+          <a:effectRef idx="2">
+            <a:schemeClr val="accent1"/>
+          </a:effectRef>
+          <a:fontRef idx="minor">
+            <a:schemeClr val="lt1"/>
+          </a:fontRef>
+        </p:style>
+        <p:txBody>
+          <a:bodyPr rtlCol="0" anchor="ctr"/>
+          <a:lstStyle/>
+          <a:p>
+            <a:pPr algn="ctr"/>
+          </a:p>
+        </p:txBody>
+      </p:sp>
+      <p:sp>
+        <p:nvSpPr>
+          <p:cNvPr id="13" name="Rectangle 12"/>
+          <p:cNvSpPr/>
+          <p:nvPr/>
+        </p:nvSpPr>
+        <p:spPr>
+          <a:xfrm>
+            <a:off x="320040" y="2331720"/>
+            <a:ext cx="493776" cy="969264"/>
+          </a:xfrm>
+          <a:prstGeom prst="rect">
+            <a:avLst/>
+          </a:prstGeom>
+          <a:solidFill>
+            <a:srgbClr val="0E886E"/>
+          </a:solidFill>
+          <a:ln>
+            <a:noFill/>
+          </a:ln>
+        </p:spPr>
+        <p:style>
+          <a:lnRef idx="1">
+            <a:schemeClr val="accent1"/>
+          </a:lnRef>
+          <a:fillRef idx="3">
+            <a:schemeClr val="accent1"/>
+          </a:fillRef>
+          <a:effectRef idx="2">
+            <a:schemeClr val="accent1"/>
+          </a:effectRef>
+          <a:fontRef idx="minor">
+            <a:schemeClr val="lt1"/>
+          </a:fontRef>
+        </p:style>
+        <p:txBody>
+          <a:bodyPr rtlCol="0" anchor="ctr"/>
+          <a:lstStyle/>
+          <a:p>
+            <a:pPr algn="ctr"/>
+          </a:p>
+        </p:txBody>
+      </p:sp>
+      <p:sp>
+        <p:nvSpPr>
+          <p:cNvPr id="14" name="TextBox 13"/>
+          <p:cNvSpPr txBox="1"/>
+          <p:nvPr/>
+        </p:nvSpPr>
+        <p:spPr>
+          <a:xfrm>
+            <a:off x="320040" y="2532888"/>
+            <a:ext cx="493776" cy="493776"/>
+          </a:xfrm>
+          <a:prstGeom prst="rect">
+            <a:avLst/>
+          </a:prstGeom>
+          <a:noFill/>
+        </p:spPr>
+        <p:txBody>
+          <a:bodyPr wrap="square">
+            <a:spAutoFit/>
+          </a:bodyPr>
+          <a:lstStyle/>
+          <a:p>
+            <a:pPr algn="ctr"/>
+            <a:r>
+              <a:rPr sz="2600" b="1" i="0">
+                <a:solidFill>
+                  <a:srgbClr val="FFFFFF"/>
+                </a:solidFill>
+              </a:rPr>
+              <a:t>2</a:t>
+            </a:r>
+          </a:p>
+        </p:txBody>
+      </p:sp>
+      <p:sp>
+        <p:nvSpPr>
+          <p:cNvPr id="15" name="TextBox 14"/>
+          <p:cNvSpPr txBox="1"/>
+          <p:nvPr/>
+        </p:nvSpPr>
+        <p:spPr>
+          <a:xfrm>
+            <a:off x="950976" y="2386584"/>
+            <a:ext cx="6949440" cy="329184"/>
+          </a:xfrm>
+          <a:prstGeom prst="rect">
+            <a:avLst/>
+          </a:prstGeom>
+          <a:noFill/>
+        </p:spPr>
+        <p:txBody>
+          <a:bodyPr wrap="square">
+            <a:spAutoFit/>
+          </a:bodyPr>
+          <a:lstStyle/>
+          <a:p>
+            <a:pPr algn="l"/>
+            <a:r>
+              <a:rPr sz="1400" b="1" i="0">
+                <a:solidFill>
+                  <a:srgbClr val="1A234E"/>
+                </a:solidFill>
+              </a:rPr>
+              <a:t>Free Public APIs Are Production-Grade</a:t>
+            </a:r>
+          </a:p>
+        </p:txBody>
+      </p:sp>
+      <p:sp>
+        <p:nvSpPr>
+          <p:cNvPr id="16" name="TextBox 15"/>
+          <p:cNvSpPr txBox="1"/>
+          <p:nvPr/>
+        </p:nvSpPr>
+        <p:spPr>
+          <a:xfrm>
+            <a:off x="950976" y="2752344"/>
+            <a:ext cx="10515600" cy="493776"/>
+          </a:xfrm>
+          <a:prstGeom prst="rect">
+            <a:avLst/>
+          </a:prstGeom>
+          <a:noFill/>
+        </p:spPr>
+        <p:txBody>
+          <a:bodyPr wrap="square">
+            <a:spAutoFit/>
+          </a:bodyPr>
+          <a:lstStyle/>
+          <a:p>
+            <a:pPr algn="l"/>
+            <a:r>
+              <a:rPr sz="1100" b="0" i="0">
+                <a:solidFill>
+                  <a:srgbClr val="282838"/>
+                </a:solidFill>
+              </a:rPr>
+              <a:t>Nominatim, US Census ACS5, and FCC APIs are reliable, rate-limit tolerant, and sufficient for national coverage. No paid commercial geocoder was needed at our scale.</a:t>
+            </a:r>
+          </a:p>
+        </p:txBody>
+      </p:sp>
+      <p:sp>
+        <p:nvSpPr>
+          <p:cNvPr id="17" name="Rectangle 16"/>
+          <p:cNvSpPr/>
+          <p:nvPr/>
+        </p:nvSpPr>
+        <p:spPr>
+          <a:xfrm>
+            <a:off x="320040" y="3401568"/>
+            <a:ext cx="11539728" cy="969264"/>
+          </a:xfrm>
+          <a:prstGeom prst="rect">
+            <a:avLst/>
+          </a:prstGeom>
+          <a:solidFill>
+            <a:srgbClr val="FFFFFF"/>
+          </a:solidFill>
+          <a:ln>
+            <a:noFill/>
+          </a:ln>
+        </p:spPr>
+        <p:style>
+          <a:lnRef idx="1">
+            <a:schemeClr val="accent1"/>
+          </a:lnRef>
+          <a:fillRef idx="3">
+            <a:schemeClr val="accent1"/>
+          </a:fillRef>
+          <a:effectRef idx="2">
+            <a:schemeClr val="accent1"/>
+          </a:effectRef>
+          <a:fontRef idx="minor">
+            <a:schemeClr val="lt1"/>
+          </a:fontRef>
+        </p:style>
+        <p:txBody>
+          <a:bodyPr rtlCol="0" anchor="ctr"/>
+          <a:lstStyle/>
+          <a:p>
+            <a:pPr algn="ctr"/>
+          </a:p>
+        </p:txBody>
+      </p:sp>
+      <p:sp>
+        <p:nvSpPr>
+          <p:cNvPr id="18" name="Rectangle 17"/>
+          <p:cNvSpPr/>
+          <p:nvPr/>
+        </p:nvSpPr>
+        <p:spPr>
+          <a:xfrm>
+            <a:off x="320040" y="3401568"/>
+            <a:ext cx="493776" cy="969264"/>
+          </a:xfrm>
+          <a:prstGeom prst="rect">
+            <a:avLst/>
+          </a:prstGeom>
+          <a:solidFill>
+            <a:srgbClr val="D4741A"/>
+          </a:solidFill>
+          <a:ln>
+            <a:noFill/>
+          </a:ln>
+        </p:spPr>
+        <p:style>
+          <a:lnRef idx="1">
+            <a:schemeClr val="accent1"/>
+          </a:lnRef>
+          <a:fillRef idx="3">
+            <a:schemeClr val="accent1"/>
+          </a:fillRef>
+          <a:effectRef idx="2">
+            <a:schemeClr val="accent1"/>
+          </a:effectRef>
+          <a:fontRef idx="minor">
+            <a:schemeClr val="lt1"/>
+          </a:fontRef>
+        </p:style>
+        <p:txBody>
+          <a:bodyPr rtlCol="0" anchor="ctr"/>
+          <a:lstStyle/>
+          <a:p>
+            <a:pPr algn="ctr"/>
+          </a:p>
+        </p:txBody>
+      </p:sp>
+      <p:sp>
+        <p:nvSpPr>
+          <p:cNvPr id="19" name="TextBox 18"/>
+          <p:cNvSpPr txBox="1"/>
+          <p:nvPr/>
+        </p:nvSpPr>
+        <p:spPr>
+          <a:xfrm>
+            <a:off x="320040" y="3602736"/>
+            <a:ext cx="493776" cy="493776"/>
+          </a:xfrm>
+          <a:prstGeom prst="rect">
+            <a:avLst/>
+          </a:prstGeom>
+          <a:noFill/>
+        </p:spPr>
+        <p:txBody>
+          <a:bodyPr wrap="square">
+            <a:spAutoFit/>
+          </a:bodyPr>
+          <a:lstStyle/>
+          <a:p>
+            <a:pPr algn="ctr"/>
+            <a:r>
+              <a:rPr sz="2600" b="1" i="0">
+                <a:solidFill>
+                  <a:srgbClr val="FFFFFF"/>
+                </a:solidFill>
+              </a:rPr>
+              <a:t>3</a:t>
+            </a:r>
+          </a:p>
+        </p:txBody>
+      </p:sp>
+      <p:sp>
+        <p:nvSpPr>
+          <p:cNvPr id="20" name="TextBox 19"/>
+          <p:cNvSpPr txBox="1"/>
+          <p:nvPr/>
+        </p:nvSpPr>
+        <p:spPr>
+          <a:xfrm>
+            <a:off x="950976" y="3456432"/>
+            <a:ext cx="6949440" cy="329184"/>
+          </a:xfrm>
+          <a:prstGeom prst="rect">
+            <a:avLst/>
+          </a:prstGeom>
+          <a:noFill/>
+        </p:spPr>
+        <p:txBody>
+          <a:bodyPr wrap="square">
+            <a:spAutoFit/>
+          </a:bodyPr>
+          <a:lstStyle/>
+          <a:p>
+            <a:pPr algn="l"/>
+            <a:r>
+              <a:rPr sz="1400" b="1" i="0">
+                <a:solidFill>
+                  <a:srgbClr val="1A234E"/>
+                </a:solidFill>
+              </a:rPr>
+              <a:t>Schema Discipline Saves Hours of Debugging</a:t>
+            </a:r>
+          </a:p>
+        </p:txBody>
+      </p:sp>
+      <p:sp>
+        <p:nvSpPr>
+          <p:cNvPr id="21" name="TextBox 20"/>
+          <p:cNvSpPr txBox="1"/>
+          <p:nvPr/>
+        </p:nvSpPr>
+        <p:spPr>
+          <a:xfrm>
+            <a:off x="950976" y="3822191"/>
+            <a:ext cx="10515600" cy="493776"/>
+          </a:xfrm>
+          <a:prstGeom prst="rect">
+            <a:avLst/>
+          </a:prstGeom>
+          <a:noFill/>
+        </p:spPr>
+        <p:txBody>
+          <a:bodyPr wrap="square">
+            <a:spAutoFit/>
+          </a:bodyPr>
+          <a:lstStyle/>
+          <a:p>
+            <a:pPr algn="l"/>
+            <a:r>
+              <a:rPr sz="1100" b="0" i="0">
+                <a:solidFill>
+                  <a:srgbClr val="282838"/>
+                </a:solidFill>
+              </a:rPr>
+              <a:t>Running Alembic migration-first from day one would have prevented the production 500-error incident. Always treat DB schema as code — never a runtime convenience.</a:t>
+            </a:r>
+          </a:p>
+        </p:txBody>
+      </p:sp>
+      <p:sp>
+        <p:nvSpPr>
+          <p:cNvPr id="22" name="Rectangle 21"/>
+          <p:cNvSpPr/>
+          <p:nvPr/>
+        </p:nvSpPr>
+        <p:spPr>
+          <a:xfrm>
+            <a:off x="320040" y="4471416"/>
+            <a:ext cx="11539728" cy="969264"/>
+          </a:xfrm>
+          <a:prstGeom prst="rect">
+            <a:avLst/>
+          </a:prstGeom>
+          <a:solidFill>
+            <a:srgbClr val="FFFFFF"/>
+          </a:solidFill>
+          <a:ln>
+            <a:noFill/>
+          </a:ln>
+        </p:spPr>
+        <p:style>
+          <a:lnRef idx="1">
+            <a:schemeClr val="accent1"/>
+          </a:lnRef>
+          <a:fillRef idx="3">
+            <a:schemeClr val="accent1"/>
+          </a:fillRef>
+          <a:effectRef idx="2">
+            <a:schemeClr val="accent1"/>
+          </a:effectRef>
+          <a:fontRef idx="minor">
+            <a:schemeClr val="lt1"/>
+          </a:fontRef>
+        </p:style>
+        <p:txBody>
+          <a:bodyPr rtlCol="0" anchor="ctr"/>
+          <a:lstStyle/>
+          <a:p>
+            <a:pPr algn="ctr"/>
+          </a:p>
+        </p:txBody>
+      </p:sp>
+      <p:sp>
+        <p:nvSpPr>
+          <p:cNvPr id="23" name="Rectangle 22"/>
+          <p:cNvSpPr/>
+          <p:nvPr/>
+        </p:nvSpPr>
+        <p:spPr>
+          <a:xfrm>
+            <a:off x="320040" y="4471416"/>
+            <a:ext cx="493776" cy="969264"/>
+          </a:xfrm>
+          <a:prstGeom prst="rect">
+            <a:avLst/>
+          </a:prstGeom>
+          <a:solidFill>
+            <a:srgbClr val="27AE60"/>
+          </a:solidFill>
+          <a:ln>
+            <a:noFill/>
+          </a:ln>
+        </p:spPr>
+        <p:style>
+          <a:lnRef idx="1">
+            <a:schemeClr val="accent1"/>
+          </a:lnRef>
+          <a:fillRef idx="3">
+            <a:schemeClr val="accent1"/>
+          </a:fillRef>
+          <a:effectRef idx="2">
+            <a:schemeClr val="accent1"/>
+          </a:effectRef>
+          <a:fontRef idx="minor">
+            <a:schemeClr val="lt1"/>
+          </a:fontRef>
+        </p:style>
+        <p:txBody>
+          <a:bodyPr rtlCol="0" anchor="ctr"/>
+          <a:lstStyle/>
+          <a:p>
+            <a:pPr algn="ctr"/>
+          </a:p>
+        </p:txBody>
+      </p:sp>
+      <p:sp>
+        <p:nvSpPr>
+          <p:cNvPr id="24" name="TextBox 23"/>
+          <p:cNvSpPr txBox="1"/>
+          <p:nvPr/>
+        </p:nvSpPr>
+        <p:spPr>
+          <a:xfrm>
+            <a:off x="320040" y="4672583"/>
+            <a:ext cx="493776" cy="493776"/>
+          </a:xfrm>
+          <a:prstGeom prst="rect">
+            <a:avLst/>
+          </a:prstGeom>
+          <a:noFill/>
+        </p:spPr>
+        <p:txBody>
+          <a:bodyPr wrap="square">
+            <a:spAutoFit/>
+          </a:bodyPr>
+          <a:lstStyle/>
+          <a:p>
+            <a:pPr algn="ctr"/>
+            <a:r>
+              <a:rPr sz="2600" b="1" i="0">
+                <a:solidFill>
+                  <a:srgbClr val="FFFFFF"/>
+                </a:solidFill>
+              </a:rPr>
+              <a:t>4</a:t>
+            </a:r>
+          </a:p>
+        </p:txBody>
+      </p:sp>
+      <p:sp>
+        <p:nvSpPr>
+          <p:cNvPr id="25" name="TextBox 24"/>
+          <p:cNvSpPr txBox="1"/>
+          <p:nvPr/>
+        </p:nvSpPr>
+        <p:spPr>
+          <a:xfrm>
+            <a:off x="950976" y="4526279"/>
+            <a:ext cx="6949440" cy="329184"/>
+          </a:xfrm>
+          <a:prstGeom prst="rect">
+            <a:avLst/>
+          </a:prstGeom>
+          <a:noFill/>
+        </p:spPr>
+        <p:txBody>
+          <a:bodyPr wrap="square">
+            <a:spAutoFit/>
+          </a:bodyPr>
+          <a:lstStyle/>
+          <a:p>
+            <a:pPr algn="l"/>
+            <a:r>
+              <a:rPr sz="1400" b="1" i="0">
+                <a:solidFill>
+                  <a:srgbClr val="1A234E"/>
+                </a:solidFill>
+              </a:rPr>
+              <a:t>Interaction Features &amp; Outlier Capping Are High-ROI</a:t>
+            </a:r>
+          </a:p>
+        </p:txBody>
+      </p:sp>
+      <p:sp>
+        <p:nvSpPr>
+          <p:cNvPr id="26" name="TextBox 25"/>
+          <p:cNvSpPr txBox="1"/>
+          <p:nvPr/>
+        </p:nvSpPr>
+        <p:spPr>
+          <a:xfrm>
+            <a:off x="950976" y="4892040"/>
+            <a:ext cx="10515600" cy="493776"/>
+          </a:xfrm>
+          <a:prstGeom prst="rect">
+            <a:avLst/>
+          </a:prstGeom>
+          <a:noFill/>
+        </p:spPr>
+        <p:txBody>
+          <a:bodyPr wrap="square">
+            <a:spAutoFit/>
+          </a:bodyPr>
+          <a:lstStyle/>
+          <a:p>
+            <a:pPr algn="l"/>
+            <a:r>
+              <a:rPr sz="1100" b="0" i="0">
+                <a:solidFill>
+                  <a:srgbClr val="282838"/>
+                </a:solidFill>
+              </a:rPr>
+              <a:t>QualArea (OverallQual × GrLivArea) + p99 price capping dropped RMSE by 26% in one pass — larger gain than adding an entire new data source.</a:t>
+            </a:r>
+          </a:p>
+        </p:txBody>
+      </p:sp>
+      <p:sp>
+        <p:nvSpPr>
+          <p:cNvPr id="27" name="Rectangle 26"/>
+          <p:cNvSpPr/>
+          <p:nvPr/>
+        </p:nvSpPr>
+        <p:spPr>
+          <a:xfrm>
+            <a:off x="320040" y="5541264"/>
+            <a:ext cx="11539728" cy="969264"/>
+          </a:xfrm>
+          <a:prstGeom prst="rect">
+            <a:avLst/>
+          </a:prstGeom>
+          <a:solidFill>
+            <a:srgbClr val="FFFFFF"/>
+          </a:solidFill>
+          <a:ln>
+            <a:noFill/>
+          </a:ln>
+        </p:spPr>
+        <p:style>
+          <a:lnRef idx="1">
+            <a:schemeClr val="accent1"/>
+          </a:lnRef>
+          <a:fillRef idx="3">
+            <a:schemeClr val="accent1"/>
+          </a:fillRef>
+          <a:effectRef idx="2">
+            <a:schemeClr val="accent1"/>
+          </a:effectRef>
+          <a:fontRef idx="minor">
+            <a:schemeClr val="lt1"/>
+          </a:fontRef>
+        </p:style>
+        <p:txBody>
+          <a:bodyPr rtlCol="0" anchor="ctr"/>
+          <a:lstStyle/>
+          <a:p>
+            <a:pPr algn="ctr"/>
+          </a:p>
+        </p:txBody>
+      </p:sp>
+      <p:sp>
+        <p:nvSpPr>
+          <p:cNvPr id="28" name="Rectangle 27"/>
+          <p:cNvSpPr/>
+          <p:nvPr/>
+        </p:nvSpPr>
+        <p:spPr>
+          <a:xfrm>
+            <a:off x="320040" y="5541264"/>
+            <a:ext cx="493776" cy="969264"/>
+          </a:xfrm>
+          <a:prstGeom prst="rect">
+            <a:avLst/>
+          </a:prstGeom>
+          <a:solidFill>
+            <a:srgbClr val="1A234E"/>
+          </a:solidFill>
+          <a:ln>
+            <a:noFill/>
+          </a:ln>
+        </p:spPr>
+        <p:style>
+          <a:lnRef idx="1">
+            <a:schemeClr val="accent1"/>
+          </a:lnRef>
+          <a:fillRef idx="3">
+            <a:schemeClr val="accent1"/>
+          </a:fillRef>
+          <a:effectRef idx="2">
+            <a:schemeClr val="accent1"/>
+          </a:effectRef>
+          <a:fontRef idx="minor">
+            <a:schemeClr val="lt1"/>
+          </a:fontRef>
+        </p:style>
+        <p:txBody>
+          <a:bodyPr rtlCol="0" anchor="ctr"/>
+          <a:lstStyle/>
+          <a:p>
+            <a:pPr algn="ctr"/>
+          </a:p>
+        </p:txBody>
+      </p:sp>
+      <p:sp>
+        <p:nvSpPr>
+          <p:cNvPr id="29" name="TextBox 28"/>
+          <p:cNvSpPr txBox="1"/>
+          <p:nvPr/>
+        </p:nvSpPr>
+        <p:spPr>
+          <a:xfrm>
+            <a:off x="320040" y="5742431"/>
+            <a:ext cx="493776" cy="493776"/>
+          </a:xfrm>
+          <a:prstGeom prst="rect">
+            <a:avLst/>
+          </a:prstGeom>
+          <a:noFill/>
+        </p:spPr>
+        <p:txBody>
+          <a:bodyPr wrap="square">
+            <a:spAutoFit/>
+          </a:bodyPr>
+          <a:lstStyle/>
+          <a:p>
+            <a:pPr algn="ctr"/>
+            <a:r>
+              <a:rPr sz="2600" b="1" i="0">
+                <a:solidFill>
+                  <a:srgbClr val="FFFFFF"/>
+                </a:solidFill>
+              </a:rPr>
+              <a:t>5</a:t>
+            </a:r>
+          </a:p>
+        </p:txBody>
+      </p:sp>
+      <p:sp>
+        <p:nvSpPr>
+          <p:cNvPr id="30" name="TextBox 29"/>
+          <p:cNvSpPr txBox="1"/>
+          <p:nvPr/>
+        </p:nvSpPr>
+        <p:spPr>
+          <a:xfrm>
+            <a:off x="950976" y="5596127"/>
+            <a:ext cx="6949440" cy="329184"/>
+          </a:xfrm>
+          <a:prstGeom prst="rect">
+            <a:avLst/>
+          </a:prstGeom>
+          <a:noFill/>
+        </p:spPr>
+        <p:txBody>
+          <a:bodyPr wrap="square">
+            <a:spAutoFit/>
+          </a:bodyPr>
+          <a:lstStyle/>
+          <a:p>
+            <a:pPr algn="l"/>
+            <a:r>
+              <a:rPr sz="1400" b="1" i="0">
+                <a:solidFill>
+                  <a:srgbClr val="1A234E"/>
+                </a:solidFill>
+              </a:rPr>
+              <a:t>Observability Is a Feature, Not an Afterthought</a:t>
+            </a:r>
+          </a:p>
+        </p:txBody>
+      </p:sp>
+      <p:sp>
+        <p:nvSpPr>
+          <p:cNvPr id="31" name="TextBox 30"/>
+          <p:cNvSpPr txBox="1"/>
+          <p:nvPr/>
+        </p:nvSpPr>
+        <p:spPr>
+          <a:xfrm>
+            <a:off x="950976" y="5961888"/>
+            <a:ext cx="10515600" cy="493776"/>
+          </a:xfrm>
+          <a:prstGeom prst="rect">
+            <a:avLst/>
+          </a:prstGeom>
+          <a:noFill/>
+        </p:spPr>
+        <p:txBody>
+          <a:bodyPr wrap="square">
+            <a:spAutoFit/>
+          </a:bodyPr>
+          <a:lstStyle/>
+          <a:p>
+            <a:pPr algn="l"/>
+            <a:r>
+              <a:rPr sz="1100" b="0" i="0">
+                <a:solidFill>
+                  <a:srgbClr val="282838"/>
+                </a:solidFill>
+              </a:rPr>
+              <a:t>Workflow events, audit traces, policy metadata, and the health endpoint transformed a black-box API into a debuggable, governable system — essential for a multi-developer group project.</a:t>
+            </a:r>
+          </a:p>
+        </p:txBody>
+      </p:sp>
+    </p:spTree>
+  </p:cSld>
+  <p:clrMapOvr>
+    <a:masterClrMapping/>
+  </p:clrMapOvr>
+</p:sld>
+</file>
+
+<file path=ppt/slides/slide14.xml><?xml version="1.0" encoding="utf-8"?>
+<p:sld xmlns:a="http://schemas.openxmlformats.org/drawingml/2006/main" xmlns:p="http://schemas.openxmlformats.org/presentationml/2006/main" xmlns:r="http://schemas.openxmlformats.org/officeDocument/2006/relationships">
+  <p:cSld>
+    <p:spTree>
+      <p:nvGrpSpPr>
+        <p:cNvPr id="1" name=""/>
+        <p:cNvGrpSpPr/>
+        <p:nvPr/>
+      </p:nvGrpSpPr>
+      <p:grpSpPr/>
+      <p:sp>
+        <p:nvSpPr>
+          <p:cNvPr id="2" name="Rectangle 1"/>
+          <p:cNvSpPr/>
+          <p:nvPr/>
+        </p:nvSpPr>
+        <p:spPr>
+          <a:xfrm>
+            <a:off x="0" y="0"/>
+            <a:ext cx="12188952" cy="6858000"/>
+          </a:xfrm>
+          <a:prstGeom prst="rect">
+            <a:avLst/>
+          </a:prstGeom>
+          <a:solidFill>
+            <a:srgbClr val="1A234E"/>
+          </a:solidFill>
+          <a:ln>
+            <a:noFill/>
+          </a:ln>
+        </p:spPr>
+        <p:style>
+          <a:lnRef idx="1">
+            <a:schemeClr val="accent1"/>
+          </a:lnRef>
+          <a:fillRef idx="3">
+            <a:schemeClr val="accent1"/>
+          </a:fillRef>
+          <a:effectRef idx="2">
+            <a:schemeClr val="accent1"/>
+          </a:effectRef>
+          <a:fontRef idx="minor">
+            <a:schemeClr val="lt1"/>
+          </a:fontRef>
+        </p:style>
+        <p:txBody>
+          <a:bodyPr rtlCol="0" anchor="ctr"/>
+          <a:lstStyle/>
+          <a:p>
+            <a:pPr algn="ctr"/>
+          </a:p>
+        </p:txBody>
+      </p:sp>
+      <p:sp>
+        <p:nvSpPr>
+          <p:cNvPr id="3" name="Rectangle 2"/>
+          <p:cNvSpPr/>
+          <p:nvPr/>
+        </p:nvSpPr>
+        <p:spPr>
+          <a:xfrm>
+            <a:off x="0" y="0"/>
+            <a:ext cx="12188952" cy="146304"/>
           </a:xfrm>
           <a:prstGeom prst="rect">
             <a:avLst/>
@@ -8558,6 +10310,160 @@
       </p:sp>
       <p:sp>
         <p:nvSpPr>
+          <p:cNvPr id="4" name="Rectangle 3"/>
+          <p:cNvSpPr/>
+          <p:nvPr/>
+        </p:nvSpPr>
+        <p:spPr>
+          <a:xfrm>
+            <a:off x="0" y="6711696"/>
+            <a:ext cx="12188952" cy="146304"/>
+          </a:xfrm>
+          <a:prstGeom prst="rect">
+            <a:avLst/>
+          </a:prstGeom>
+          <a:solidFill>
+            <a:srgbClr val="667EEA"/>
+          </a:solidFill>
+          <a:ln>
+            <a:noFill/>
+          </a:ln>
+        </p:spPr>
+        <p:style>
+          <a:lnRef idx="1">
+            <a:schemeClr val="accent1"/>
+          </a:lnRef>
+          <a:fillRef idx="3">
+            <a:schemeClr val="accent1"/>
+          </a:fillRef>
+          <a:effectRef idx="2">
+            <a:schemeClr val="accent1"/>
+          </a:effectRef>
+          <a:fontRef idx="minor">
+            <a:schemeClr val="lt1"/>
+          </a:fontRef>
+        </p:style>
+        <p:txBody>
+          <a:bodyPr rtlCol="0" anchor="ctr"/>
+          <a:lstStyle/>
+          <a:p>
+            <a:pPr algn="ctr"/>
+          </a:p>
+        </p:txBody>
+      </p:sp>
+      <p:sp>
+        <p:nvSpPr>
+          <p:cNvPr id="5" name="TextBox 4"/>
+          <p:cNvSpPr txBox="1"/>
+          <p:nvPr/>
+        </p:nvSpPr>
+        <p:spPr>
+          <a:xfrm>
+            <a:off x="914400" y="1691640"/>
+            <a:ext cx="10360152" cy="1097280"/>
+          </a:xfrm>
+          <a:prstGeom prst="rect">
+            <a:avLst/>
+          </a:prstGeom>
+          <a:noFill/>
+        </p:spPr>
+        <p:txBody>
+          <a:bodyPr wrap="square">
+            <a:spAutoFit/>
+          </a:bodyPr>
+          <a:lstStyle/>
+          <a:p>
+            <a:pPr algn="ctr"/>
+            <a:r>
+              <a:rPr sz="5600" b="1" i="0">
+                <a:solidFill>
+                  <a:srgbClr val="FFFFFF"/>
+                </a:solidFill>
+              </a:rPr>
+              <a:t>Thank You</a:t>
+            </a:r>
+          </a:p>
+        </p:txBody>
+      </p:sp>
+      <p:sp>
+        <p:nvSpPr>
+          <p:cNvPr id="6" name="TextBox 5"/>
+          <p:cNvSpPr txBox="1"/>
+          <p:nvPr/>
+        </p:nvSpPr>
+        <p:spPr>
+          <a:xfrm>
+            <a:off x="914400" y="2834640"/>
+            <a:ext cx="10360152" cy="603504"/>
+          </a:xfrm>
+          <a:prstGeom prst="rect">
+            <a:avLst/>
+          </a:prstGeom>
+          <a:noFill/>
+        </p:spPr>
+        <p:txBody>
+          <a:bodyPr wrap="square">
+            <a:spAutoFit/>
+          </a:bodyPr>
+          <a:lstStyle/>
+          <a:p>
+            <a:pPr algn="ctr"/>
+            <a:r>
+              <a:rPr sz="2400" b="0" i="0">
+                <a:solidFill>
+                  <a:srgbClr val="A0AEF5"/>
+                </a:solidFill>
+              </a:rPr>
+              <a:t>Questions &amp; Discussion</a:t>
+            </a:r>
+          </a:p>
+        </p:txBody>
+      </p:sp>
+      <p:sp>
+        <p:nvSpPr>
+          <p:cNvPr id="7" name="Rectangle 6"/>
+          <p:cNvSpPr/>
+          <p:nvPr/>
+        </p:nvSpPr>
+        <p:spPr>
+          <a:xfrm>
+            <a:off x="2560320" y="3584448"/>
+            <a:ext cx="7068312" cy="64008"/>
+          </a:xfrm>
+          <a:prstGeom prst="rect">
+            <a:avLst/>
+          </a:prstGeom>
+          <a:solidFill>
+            <a:srgbClr val="667EEA"/>
+          </a:solidFill>
+          <a:ln>
+            <a:noFill/>
+          </a:ln>
+        </p:spPr>
+        <p:style>
+          <a:lnRef idx="1">
+            <a:schemeClr val="accent1"/>
+          </a:lnRef>
+          <a:fillRef idx="3">
+            <a:schemeClr val="accent1"/>
+          </a:fillRef>
+          <a:effectRef idx="2">
+            <a:schemeClr val="accent1"/>
+          </a:effectRef>
+          <a:fontRef idx="minor">
+            <a:schemeClr val="lt1"/>
+          </a:fontRef>
+        </p:style>
+        <p:txBody>
+          <a:bodyPr rtlCol="0" anchor="ctr"/>
+          <a:lstStyle/>
+          <a:p>
+            <a:pPr algn="ctr"/>
+          </a:p>
+        </p:txBody>
+      </p:sp>
+      <p:sp>
+        <p:nvSpPr>
           <p:cNvPr id="8" name="TextBox 7"/>
           <p:cNvSpPr txBox="1"/>
           <p:nvPr/>
@@ -8619,7 +10525,7 @@
                   <a:srgbClr val="A0AEF5"/>
                 </a:solidFill>
               </a:rPr>
-              <a:t>22,098 training rows   ·   16 optimised features   ·   92 tests passing</a:t>
+              <a:t>22,098 training rows   ·   16 optimised features   ·   103 tests passing (100% ✓)</a:t>
             </a:r>
           </a:p>
         </p:txBody>
@@ -8653,7 +10559,7 @@
                   <a:srgbClr val="A0AEF5"/>
                 </a:solidFill>
               </a:rPr>
-              <a:t>FastAPI  +  LightGBM  +  PostgreSQL  +  Streamlit  —  Deployed on Render</a:t>
+              <a:t>Production-Ready: All Migrations Applied  ·  Modern API Active  ·  UI Locked</a:t>
             </a:r>
           </a:p>
         </p:txBody>
@@ -9235,7 +11141,7 @@
                   <a:srgbClr val="282838"/>
                 </a:solidFill>
               </a:rPr>
-              <a:t>  •  FastAPI REST backend with 7 Alembic database migrations</a:t>
+              <a:t>  •  FastAPI REST backend with 8 Alembic database migrations</a:t>
             </a:r>
           </a:p>
         </p:txBody>
@@ -9269,7 +11175,7 @@
                   <a:srgbClr val="282838"/>
                 </a:solidFill>
               </a:rPr>
-              <a:t>  •  Streamlit live dashboard deployed on Render.com</a:t>
+              <a:t>  •  Streamlit live dashboard with live API feature badges</a:t>
             </a:r>
           </a:p>
         </p:txBody>
@@ -9337,7 +11243,7 @@
                   <a:srgbClr val="282838"/>
                 </a:solidFill>
               </a:rPr>
-              <a:t>  •  92 automated tests passing</a:t>
+              <a:t>  •  103 automated tests passing — 100% success rate</a:t>
             </a:r>
           </a:p>
         </p:txBody>
@@ -10105,7 +12011,7 @@
                   <a:srgbClr val="FFFFFF"/>
                 </a:solidFill>
               </a:rPr>
-              <a:t>92</a:t>
+              <a:t>103</a:t>
             </a:r>
           </a:p>
         </p:txBody>
@@ -10139,7 +12045,7 @@
                   <a:srgbClr val="8899BB"/>
                 </a:solidFill>
               </a:rPr>
-              <a:t>Automated tests</a:t>
+              <a:t>All pass ✓ LOCKED</a:t>
             </a:r>
           </a:p>
         </p:txBody>
@@ -21489,7 +23395,7 @@
         <p:spPr>
           <a:xfrm>
             <a:off x="6199632" y="1243584"/>
-            <a:ext cx="5687568" cy="5394960"/>
+            <a:ext cx="5687568" cy="5029200"/>
           </a:xfrm>
           <a:prstGeom prst="rect">
             <a:avLst/>
@@ -21566,7 +23472,7 @@
         <p:spPr>
           <a:xfrm>
             <a:off x="6291072" y="1737360"/>
-            <a:ext cx="5486400" cy="658368"/>
+            <a:ext cx="5486400" cy="621792"/>
           </a:xfrm>
           <a:prstGeom prst="rect">
             <a:avLst/>
@@ -21643,7 +23549,7 @@
         <p:spPr>
           <a:xfrm>
             <a:off x="6400800" y="2066543"/>
-            <a:ext cx="5285232" cy="201167"/>
+            <a:ext cx="5285232" cy="164592"/>
           </a:xfrm>
           <a:prstGeom prst="rect">
             <a:avLst/>
@@ -21676,8 +23582,8 @@
         </p:nvSpPr>
         <p:spPr>
           <a:xfrm>
-            <a:off x="6291072" y="2505456"/>
-            <a:ext cx="2633472" cy="1005840"/>
+            <a:off x="6291072" y="2450592"/>
+            <a:ext cx="2633472" cy="914400"/>
           </a:xfrm>
           <a:prstGeom prst="rect">
             <a:avLst/>
@@ -21719,7 +23625,7 @@
         </p:nvSpPr>
         <p:spPr>
           <a:xfrm>
-            <a:off x="6400800" y="2578608"/>
+            <a:off x="6400800" y="2523744"/>
             <a:ext cx="2432303" cy="237744"/>
           </a:xfrm>
           <a:prstGeom prst="rect">
@@ -21753,8 +23659,8 @@
         </p:nvSpPr>
         <p:spPr>
           <a:xfrm>
-            <a:off x="6400800" y="2834640"/>
-            <a:ext cx="2432303" cy="548640"/>
+            <a:off x="6400800" y="2779776"/>
+            <a:ext cx="2432303" cy="457200"/>
           </a:xfrm>
           <a:prstGeom prst="rect">
             <a:avLst/>
@@ -21787,7 +23693,7 @@
         </p:nvSpPr>
         <p:spPr>
           <a:xfrm>
-            <a:off x="6400800" y="3255264"/>
+            <a:off x="6400800" y="3108960"/>
             <a:ext cx="2432303" cy="201168"/>
           </a:xfrm>
           <a:prstGeom prst="rect">
@@ -21821,8 +23727,8 @@
         </p:nvSpPr>
         <p:spPr>
           <a:xfrm>
-            <a:off x="9034272" y="2505456"/>
-            <a:ext cx="2743200" cy="1005840"/>
+            <a:off x="9034272" y="2450592"/>
+            <a:ext cx="2743200" cy="914400"/>
           </a:xfrm>
           <a:prstGeom prst="rect">
             <a:avLst/>
@@ -21864,7 +23770,7 @@
         </p:nvSpPr>
         <p:spPr>
           <a:xfrm>
-            <a:off x="9144000" y="2578608"/>
+            <a:off x="9144000" y="2523744"/>
             <a:ext cx="2542032" cy="237744"/>
           </a:xfrm>
           <a:prstGeom prst="rect">
@@ -21898,8 +23804,8 @@
         </p:nvSpPr>
         <p:spPr>
           <a:xfrm>
-            <a:off x="9144000" y="2834640"/>
-            <a:ext cx="2542032" cy="548640"/>
+            <a:off x="9144000" y="2779776"/>
+            <a:ext cx="2542032" cy="457200"/>
           </a:xfrm>
           <a:prstGeom prst="rect">
             <a:avLst/>
@@ -21932,7 +23838,7 @@
         </p:nvSpPr>
         <p:spPr>
           <a:xfrm>
-            <a:off x="9144000" y="3255264"/>
+            <a:off x="9144000" y="3108960"/>
             <a:ext cx="2542032" cy="201168"/>
           </a:xfrm>
           <a:prstGeom prst="rect">
@@ -21966,8 +23872,8 @@
         </p:nvSpPr>
         <p:spPr>
           <a:xfrm>
-            <a:off x="6291072" y="3621024"/>
-            <a:ext cx="5486400" cy="1133856"/>
+            <a:off x="6291072" y="3456432"/>
+            <a:ext cx="5486400" cy="1005840"/>
           </a:xfrm>
           <a:prstGeom prst="rect">
             <a:avLst/>
@@ -22009,7 +23915,7 @@
         </p:nvSpPr>
         <p:spPr>
           <a:xfrm>
-            <a:off x="6400800" y="3675887"/>
+            <a:off x="6400800" y="3511296"/>
             <a:ext cx="5266944" cy="237744"/>
           </a:xfrm>
           <a:prstGeom prst="rect">
@@ -22043,23 +23949,23 @@
         </p:nvSpPr>
         <p:spPr>
           <a:xfrm>
-            <a:off x="6400800" y="3931920"/>
-            <a:ext cx="5266944" cy="768096"/>
-          </a:xfrm>
-          <a:prstGeom prst="rect">
-            <a:avLst/>
-          </a:prstGeom>
-          <a:noFill/>
-        </p:spPr>
-        <p:txBody>
-          <a:bodyPr wrap="square">
-            <a:spAutoFit/>
-          </a:bodyPr>
-          <a:lstStyle/>
-          <a:p>
-            <a:pPr algn="l"/>
-            <a:r>
-              <a:rPr sz="1100" b="0" i="0">
+            <a:off x="6400800" y="3749039"/>
+            <a:ext cx="5266944" cy="658368"/>
+          </a:xfrm>
+          <a:prstGeom prst="rect">
+            <a:avLst/>
+          </a:prstGeom>
+          <a:noFill/>
+        </p:spPr>
+        <p:txBody>
+          <a:bodyPr wrap="square">
+            <a:spAutoFit/>
+          </a:bodyPr>
+          <a:lstStyle/>
+          <a:p>
+            <a:pPr algn="l"/>
+            <a:r>
+              <a:rPr sz="1000" b="0" i="0">
                 <a:solidFill>
                   <a:srgbClr val="FFFFFF"/>
                 </a:solidFill>
@@ -22079,7 +23985,7 @@
         </p:nvSpPr>
         <p:spPr>
           <a:xfrm>
-            <a:off x="6291072" y="4846320"/>
+            <a:off x="6291072" y="4572000"/>
             <a:ext cx="5486400" cy="548640"/>
           </a:xfrm>
           <a:prstGeom prst="rect">
@@ -22122,7 +24028,7 @@
         </p:nvSpPr>
         <p:spPr>
           <a:xfrm>
-            <a:off x="6400800" y="4919472"/>
+            <a:off x="6400800" y="4645152"/>
             <a:ext cx="5285232" cy="237744"/>
           </a:xfrm>
           <a:prstGeom prst="rect">
@@ -22156,7 +24062,7 @@
         </p:nvSpPr>
         <p:spPr>
           <a:xfrm>
-            <a:off x="6400800" y="5175504"/>
+            <a:off x="6400800" y="4901184"/>
             <a:ext cx="5285232" cy="91439"/>
           </a:xfrm>
           <a:prstGeom prst="rect">
@@ -22190,7 +24096,7 @@
         </p:nvSpPr>
         <p:spPr>
           <a:xfrm>
-            <a:off x="6309360" y="6437376"/>
+            <a:off x="6309360" y="6217920"/>
             <a:ext cx="5449824" cy="256032"/>
           </a:xfrm>
           <a:prstGeom prst="rect">
